--- a/deliverables/Konsilys_Presentation_Investisseurs.pptx
+++ b/deliverables/Konsilys_Presentation_Investisseurs.pptx
@@ -16,6 +16,7 @@
     <p:sldId id="264" r:id="rId15"/>
     <p:sldId id="265" r:id="rId16"/>
     <p:sldId id="266" r:id="rId17"/>
+    <p:sldId id="267" r:id="rId18"/>
   </p:sldIdLst>
   <p:sldSz cx="12191695" cy="6858000" type="screen4x3"/>
   <p:notesSz cx="6858000" cy="9144000"/>
@@ -3585,7 +3586,7 @@
             <a:avLst/>
           </a:prstGeom>
           <a:solidFill>
-            <a:srgbClr val="1B2B3A"/>
+            <a:srgbClr val="FFFFFF"/>
           </a:solidFill>
           <a:ln>
             <a:noFill/>
@@ -3616,16 +3617,16 @@
       </p:sp>
       <p:sp>
         <p:nvSpPr>
-          <p:cNvPr id="3" name="Rectangle 2"/>
+          <p:cNvPr id="3" name="Rounded Rectangle 2"/>
           <p:cNvSpPr/>
           <p:nvPr/>
         </p:nvSpPr>
         <p:spPr>
           <a:xfrm>
-            <a:off x="0" y="0"/>
-            <a:ext cx="12191695" cy="6858000"/>
-          </a:xfrm>
-          <a:prstGeom prst="rect">
+            <a:off x="822960" y="594360"/>
+            <a:ext cx="2286000" cy="384048"/>
+          </a:xfrm>
+          <a:prstGeom prst="roundRect">
             <a:avLst/>
           </a:prstGeom>
           <a:solidFill>
@@ -3651,32 +3652,86 @@
           </a:fontRef>
         </p:style>
         <p:txBody>
-          <a:bodyPr rtlCol="0" anchor="ctr"/>
-          <a:lstStyle/>
-          <a:p>
-            <a:pPr algn="ctr"/>
-          </a:p>
-        </p:txBody>
-      </p:sp>
-      <p:sp>
-        <p:nvSpPr>
-          <p:cNvPr id="4" name="Rounded Rectangle 3"/>
+          <a:bodyPr rtlCol="0" anchor="ctr" wrap="square"/>
+          <a:lstStyle/>
+          <a:p>
+            <a:pPr algn="ctr">
+              <a:spcAft>
+                <a:spcPts val="600"/>
+              </a:spcAft>
+            </a:pPr>
+            <a:r>
+              <a:rPr sz="1100" b="1" i="0">
+                <a:solidFill>
+                  <a:srgbClr val="FFFFFF"/>
+                </a:solidFill>
+                <a:latin typeface="Calibri"/>
+              </a:rPr>
+              <a:t>ÉQUIPE</a:t>
+            </a:r>
+          </a:p>
+        </p:txBody>
+      </p:sp>
+      <p:sp>
+        <p:nvSpPr>
+          <p:cNvPr id="4" name="TextBox 3"/>
+          <p:cNvSpPr txBox="1"/>
+          <p:nvPr/>
+        </p:nvSpPr>
+        <p:spPr>
+          <a:xfrm>
+            <a:off x="822960" y="1005840"/>
+            <a:ext cx="10515600" cy="914400"/>
+          </a:xfrm>
+          <a:prstGeom prst="rect">
+            <a:avLst/>
+          </a:prstGeom>
+          <a:noFill/>
+        </p:spPr>
+        <p:txBody>
+          <a:bodyPr wrap="square">
+            <a:spAutoFit/>
+          </a:bodyPr>
+          <a:lstStyle/>
+          <a:p>
+            <a:pPr algn="l">
+              <a:spcAft>
+                <a:spcPts val="600"/>
+              </a:spcAft>
+            </a:pPr>
+            <a:r>
+              <a:rPr sz="3000" b="1" i="0">
+                <a:solidFill>
+                  <a:srgbClr val="1B2B3A"/>
+                </a:solidFill>
+                <a:latin typeface="Calibri"/>
+              </a:rPr>
+              <a:t>Les personnes derrière Konsilys</a:t>
+            </a:r>
+          </a:p>
+        </p:txBody>
+      </p:sp>
+      <p:sp>
+        <p:nvSpPr>
+          <p:cNvPr id="5" name="Rounded Rectangle 4"/>
           <p:cNvSpPr/>
           <p:nvPr/>
         </p:nvSpPr>
         <p:spPr>
           <a:xfrm>
-            <a:off x="822960" y="594360"/>
-            <a:ext cx="1554480" cy="384048"/>
+            <a:off x="822960" y="2286000"/>
+            <a:ext cx="3429000" cy="2926080"/>
           </a:xfrm>
           <a:prstGeom prst="roundRect">
             <a:avLst/>
           </a:prstGeom>
           <a:solidFill>
-            <a:srgbClr val="84CC16"/>
-          </a:solidFill>
-          <a:ln>
-            <a:noFill/>
+            <a:srgbClr val="F7F9FB"/>
+          </a:solidFill>
+          <a:ln w="12700">
+            <a:solidFill>
+              <a:srgbClr val="E2E8F0"/>
+            </a:solidFill>
           </a:ln>
           <a:effectLst/>
         </p:spPr>
@@ -3695,81 +3750,29 @@
           </a:fontRef>
         </p:style>
         <p:txBody>
-          <a:bodyPr rtlCol="0" anchor="ctr" wrap="square"/>
-          <a:lstStyle/>
-          <a:p>
-            <a:pPr algn="ctr">
-              <a:spcAft>
-                <a:spcPts val="600"/>
-              </a:spcAft>
-            </a:pPr>
-            <a:r>
-              <a:rPr sz="1100" b="1" i="0">
-                <a:solidFill>
-                  <a:srgbClr val="1B2B3A"/>
-                </a:solidFill>
-                <a:latin typeface="Calibri"/>
-              </a:rPr>
-              <a:t>LEVÉE</a:t>
-            </a:r>
-          </a:p>
-        </p:txBody>
-      </p:sp>
-      <p:sp>
-        <p:nvSpPr>
-          <p:cNvPr id="5" name="TextBox 4"/>
-          <p:cNvSpPr txBox="1"/>
-          <p:nvPr/>
-        </p:nvSpPr>
-        <p:spPr>
-          <a:xfrm>
-            <a:off x="822960" y="1005840"/>
-            <a:ext cx="10515600" cy="914400"/>
-          </a:xfrm>
-          <a:prstGeom prst="rect">
-            <a:avLst/>
-          </a:prstGeom>
-          <a:noFill/>
-        </p:spPr>
-        <p:txBody>
-          <a:bodyPr wrap="square">
-            <a:spAutoFit/>
-          </a:bodyPr>
-          <a:lstStyle/>
-          <a:p>
-            <a:pPr algn="l">
-              <a:spcAft>
-                <a:spcPts val="600"/>
-              </a:spcAft>
-            </a:pPr>
-            <a:r>
-              <a:rPr sz="3000" b="1" i="0">
-                <a:solidFill>
-                  <a:srgbClr val="FFFFFF"/>
-                </a:solidFill>
-                <a:latin typeface="Calibri"/>
-              </a:rPr>
-              <a:t>Financement recherché &amp; usage des fonds</a:t>
-            </a:r>
-          </a:p>
-        </p:txBody>
-      </p:sp>
-      <p:sp>
-        <p:nvSpPr>
-          <p:cNvPr id="6" name="Rounded Rectangle 5"/>
+          <a:bodyPr rtlCol="0" anchor="ctr"/>
+          <a:lstStyle/>
+          <a:p>
+            <a:pPr algn="ctr"/>
+          </a:p>
+        </p:txBody>
+      </p:sp>
+      <p:sp>
+        <p:nvSpPr>
+          <p:cNvPr id="6" name="Oval 5"/>
           <p:cNvSpPr/>
           <p:nvPr/>
         </p:nvSpPr>
         <p:spPr>
           <a:xfrm>
-            <a:off x="822960" y="2377440"/>
-            <a:ext cx="3502152" cy="2011680"/>
-          </a:xfrm>
-          <a:prstGeom prst="roundRect">
-            <a:avLst/>
-          </a:prstGeom>
-          <a:solidFill>
-            <a:srgbClr val="0F1720"/>
+            <a:off x="2057400" y="2560320"/>
+            <a:ext cx="960120" cy="960120"/>
+          </a:xfrm>
+          <a:prstGeom prst="ellipse">
+            <a:avLst/>
+          </a:prstGeom>
+          <a:solidFill>
+            <a:srgbClr val="1B2B3A"/>
           </a:solidFill>
           <a:ln>
             <a:noFill/>
@@ -3794,7 +3797,20 @@
           <a:bodyPr rtlCol="0" anchor="ctr"/>
           <a:lstStyle/>
           <a:p>
-            <a:pPr algn="ctr"/>
+            <a:pPr algn="ctr">
+              <a:spcAft>
+                <a:spcPts val="600"/>
+              </a:spcAft>
+            </a:pPr>
+            <a:r>
+              <a:rPr sz="2600" b="1" i="0">
+                <a:solidFill>
+                  <a:srgbClr val="84CC16"/>
+                </a:solidFill>
+                <a:latin typeface="Calibri"/>
+              </a:rPr>
+              <a:t>?</a:t>
+            </a:r>
           </a:p>
         </p:txBody>
       </p:sp>
@@ -3806,8 +3822,8 @@
         </p:nvSpPr>
         <p:spPr>
           <a:xfrm>
-            <a:off x="1097280" y="2697480"/>
-            <a:ext cx="2953512" cy="1463040"/>
+            <a:off x="1097280" y="3749039"/>
+            <a:ext cx="2880360" cy="1371600"/>
           </a:xfrm>
           <a:prstGeom prst="rect">
             <a:avLst/>
@@ -3820,35 +3836,51 @@
           </a:bodyPr>
           <a:lstStyle/>
           <a:p>
-            <a:pPr algn="l">
+            <a:pPr algn="ctr">
+              <a:spcAft>
+                <a:spcPts val="300"/>
+              </a:spcAft>
+            </a:pPr>
+            <a:r>
+              <a:rPr sz="1600" b="1" i="0">
+                <a:solidFill>
+                  <a:srgbClr val="1B2B3A"/>
+                </a:solidFill>
+                <a:latin typeface="Calibri"/>
+              </a:rPr>
+              <a:t>Prénom Nom</a:t>
+            </a:r>
+          </a:p>
+          <a:p>
+            <a:pPr algn="ctr">
               <a:spcAft>
                 <a:spcPts val="600"/>
               </a:spcAft>
             </a:pPr>
             <a:r>
-              <a:rPr sz="1600" b="1" i="0">
+              <a:rPr sz="1300" b="0" i="0">
                 <a:solidFill>
                   <a:srgbClr val="84CC16"/>
                 </a:solidFill>
                 <a:latin typeface="Calibri"/>
               </a:rPr>
-              <a:t>Produit &amp; Tech</a:t>
-            </a:r>
-          </a:p>
-          <a:p>
-            <a:pPr algn="l">
+              <a:t>Rôle</a:t>
+            </a:r>
+          </a:p>
+          <a:p>
+            <a:pPr algn="ctr">
               <a:spcAft>
                 <a:spcPts val="600"/>
               </a:spcAft>
             </a:pPr>
             <a:r>
-              <a:rPr sz="1300" b="0" i="0">
-                <a:solidFill>
-                  <a:srgbClr val="C7D2DD"/>
-                </a:solidFill>
-                <a:latin typeface="Calibri"/>
-              </a:rPr>
-              <a:t>Facturation, mobile, intégrations, fiabilité.</a:t>
+              <a:rPr sz="1150" b="0" i="0">
+                <a:solidFill>
+                  <a:srgbClr val="647485"/>
+                </a:solidFill>
+                <a:latin typeface="Calibri"/>
+              </a:rPr>
+              <a:t>Expérience clé, réalisations</a:t>
             </a:r>
           </a:p>
         </p:txBody>
@@ -3861,17 +3893,19 @@
         </p:nvSpPr>
         <p:spPr>
           <a:xfrm>
-            <a:off x="4599432" y="2377440"/>
-            <a:ext cx="3502152" cy="2011680"/>
+            <a:off x="4526280" y="2286000"/>
+            <a:ext cx="3429000" cy="2926080"/>
           </a:xfrm>
           <a:prstGeom prst="roundRect">
             <a:avLst/>
           </a:prstGeom>
           <a:solidFill>
-            <a:srgbClr val="0F1720"/>
-          </a:solidFill>
-          <a:ln>
-            <a:noFill/>
+            <a:srgbClr val="F7F9FB"/>
+          </a:solidFill>
+          <a:ln w="12700">
+            <a:solidFill>
+              <a:srgbClr val="E2E8F0"/>
+            </a:solidFill>
           </a:ln>
           <a:effectLst/>
         </p:spPr>
@@ -3899,75 +3933,20 @@
       </p:sp>
       <p:sp>
         <p:nvSpPr>
-          <p:cNvPr id="9" name="TextBox 8"/>
-          <p:cNvSpPr txBox="1"/>
-          <p:nvPr/>
-        </p:nvSpPr>
-        <p:spPr>
-          <a:xfrm>
-            <a:off x="4873752" y="2697480"/>
-            <a:ext cx="2953512" cy="1463040"/>
-          </a:xfrm>
-          <a:prstGeom prst="rect">
-            <a:avLst/>
-          </a:prstGeom>
-          <a:noFill/>
-        </p:spPr>
-        <p:txBody>
-          <a:bodyPr wrap="square">
-            <a:spAutoFit/>
-          </a:bodyPr>
-          <a:lstStyle/>
-          <a:p>
-            <a:pPr algn="l">
-              <a:spcAft>
-                <a:spcPts val="600"/>
-              </a:spcAft>
-            </a:pPr>
-            <a:r>
-              <a:rPr sz="1600" b="1" i="0">
-                <a:solidFill>
-                  <a:srgbClr val="84CC16"/>
-                </a:solidFill>
-                <a:latin typeface="Calibri"/>
-              </a:rPr>
-              <a:t>Commercial</a:t>
-            </a:r>
-          </a:p>
-          <a:p>
-            <a:pPr algn="l">
-              <a:spcAft>
-                <a:spcPts val="600"/>
-              </a:spcAft>
-            </a:pPr>
-            <a:r>
-              <a:rPr sz="1300" b="0" i="0">
-                <a:solidFill>
-                  <a:srgbClr val="C7D2DD"/>
-                </a:solidFill>
-                <a:latin typeface="Calibri"/>
-              </a:rPr>
-              <a:t>Équipe de vente et marketing pour accélérer l'acquisition.</a:t>
-            </a:r>
-          </a:p>
-        </p:txBody>
-      </p:sp>
-      <p:sp>
-        <p:nvSpPr>
-          <p:cNvPr id="10" name="Rounded Rectangle 9"/>
+          <p:cNvPr id="9" name="Oval 8"/>
           <p:cNvSpPr/>
           <p:nvPr/>
         </p:nvSpPr>
         <p:spPr>
           <a:xfrm>
-            <a:off x="8375904" y="2377440"/>
-            <a:ext cx="3502152" cy="2011680"/>
-          </a:xfrm>
-          <a:prstGeom prst="roundRect">
-            <a:avLst/>
-          </a:prstGeom>
-          <a:solidFill>
-            <a:srgbClr val="0F1720"/>
+            <a:off x="5760720" y="2560320"/>
+            <a:ext cx="960120" cy="960120"/>
+          </a:xfrm>
+          <a:prstGeom prst="ellipse">
+            <a:avLst/>
+          </a:prstGeom>
+          <a:solidFill>
+            <a:srgbClr val="1B2B3A"/>
           </a:solidFill>
           <a:ln>
             <a:noFill/>
@@ -3992,20 +3971,33 @@
           <a:bodyPr rtlCol="0" anchor="ctr"/>
           <a:lstStyle/>
           <a:p>
-            <a:pPr algn="ctr"/>
-          </a:p>
-        </p:txBody>
-      </p:sp>
-      <p:sp>
-        <p:nvSpPr>
-          <p:cNvPr id="11" name="TextBox 10"/>
+            <a:pPr algn="ctr">
+              <a:spcAft>
+                <a:spcPts val="600"/>
+              </a:spcAft>
+            </a:pPr>
+            <a:r>
+              <a:rPr sz="2600" b="1" i="0">
+                <a:solidFill>
+                  <a:srgbClr val="84CC16"/>
+                </a:solidFill>
+                <a:latin typeface="Calibri"/>
+              </a:rPr>
+              <a:t>?</a:t>
+            </a:r>
+          </a:p>
+        </p:txBody>
+      </p:sp>
+      <p:sp>
+        <p:nvSpPr>
+          <p:cNvPr id="10" name="TextBox 9"/>
           <p:cNvSpPr txBox="1"/>
           <p:nvPr/>
         </p:nvSpPr>
         <p:spPr>
           <a:xfrm>
-            <a:off x="8650224" y="2697480"/>
-            <a:ext cx="2953512" cy="1463040"/>
+            <a:off x="4800600" y="3749039"/>
+            <a:ext cx="2880360" cy="1371600"/>
           </a:xfrm>
           <a:prstGeom prst="rect">
             <a:avLst/>
@@ -4018,59 +4010,75 @@
           </a:bodyPr>
           <a:lstStyle/>
           <a:p>
-            <a:pPr algn="l">
+            <a:pPr algn="ctr">
+              <a:spcAft>
+                <a:spcPts val="300"/>
+              </a:spcAft>
+            </a:pPr>
+            <a:r>
+              <a:rPr sz="1600" b="1" i="0">
+                <a:solidFill>
+                  <a:srgbClr val="1B2B3A"/>
+                </a:solidFill>
+                <a:latin typeface="Calibri"/>
+              </a:rPr>
+              <a:t>Prénom Nom</a:t>
+            </a:r>
+          </a:p>
+          <a:p>
+            <a:pPr algn="ctr">
               <a:spcAft>
                 <a:spcPts val="600"/>
               </a:spcAft>
             </a:pPr>
             <a:r>
-              <a:rPr sz="1600" b="1" i="0">
+              <a:rPr sz="1300" b="0" i="0">
                 <a:solidFill>
                   <a:srgbClr val="84CC16"/>
                 </a:solidFill>
                 <a:latin typeface="Calibri"/>
               </a:rPr>
-              <a:t>Support &amp; Succès client</a:t>
-            </a:r>
-          </a:p>
-          <a:p>
-            <a:pPr algn="l">
+              <a:t>Rôle</a:t>
+            </a:r>
+          </a:p>
+          <a:p>
+            <a:pPr algn="ctr">
               <a:spcAft>
                 <a:spcPts val="600"/>
               </a:spcAft>
             </a:pPr>
             <a:r>
-              <a:rPr sz="1300" b="0" i="0">
-                <a:solidFill>
-                  <a:srgbClr val="C7D2DD"/>
-                </a:solidFill>
-                <a:latin typeface="Calibri"/>
-              </a:rPr>
-              <a:t>Onboarding et rétention à mesure que la base grandit.</a:t>
-            </a:r>
-          </a:p>
-        </p:txBody>
-      </p:sp>
-      <p:sp>
-        <p:nvSpPr>
-          <p:cNvPr id="12" name="Rounded Rectangle 11"/>
+              <a:rPr sz="1150" b="0" i="0">
+                <a:solidFill>
+                  <a:srgbClr val="647485"/>
+                </a:solidFill>
+                <a:latin typeface="Calibri"/>
+              </a:rPr>
+              <a:t>Expérience clé, réalisations</a:t>
+            </a:r>
+          </a:p>
+        </p:txBody>
+      </p:sp>
+      <p:sp>
+        <p:nvSpPr>
+          <p:cNvPr id="11" name="Rounded Rectangle 10"/>
           <p:cNvSpPr/>
           <p:nvPr/>
         </p:nvSpPr>
         <p:spPr>
           <a:xfrm>
-            <a:off x="822960" y="4892040"/>
-            <a:ext cx="10543032" cy="914400"/>
+            <a:off x="8229600" y="2286000"/>
+            <a:ext cx="3429000" cy="2926080"/>
           </a:xfrm>
           <a:prstGeom prst="roundRect">
             <a:avLst/>
           </a:prstGeom>
           <a:solidFill>
-            <a:srgbClr val="0F1720"/>
-          </a:solidFill>
-          <a:ln w="15875">
+            <a:srgbClr val="F7F9FB"/>
+          </a:solidFill>
+          <a:ln w="12700">
             <a:solidFill>
-              <a:srgbClr val="84CC16"/>
+              <a:srgbClr val="E2E8F0"/>
             </a:solidFill>
           </a:ln>
           <a:effectLst/>
@@ -4099,14 +4107,71 @@
       </p:sp>
       <p:sp>
         <p:nvSpPr>
+          <p:cNvPr id="12" name="Oval 11"/>
+          <p:cNvSpPr/>
+          <p:nvPr/>
+        </p:nvSpPr>
+        <p:spPr>
+          <a:xfrm>
+            <a:off x="9464040" y="2560320"/>
+            <a:ext cx="960120" cy="960120"/>
+          </a:xfrm>
+          <a:prstGeom prst="ellipse">
+            <a:avLst/>
+          </a:prstGeom>
+          <a:solidFill>
+            <a:srgbClr val="1B2B3A"/>
+          </a:solidFill>
+          <a:ln>
+            <a:noFill/>
+          </a:ln>
+          <a:effectLst/>
+        </p:spPr>
+        <p:style>
+          <a:lnRef idx="1">
+            <a:schemeClr val="accent1"/>
+          </a:lnRef>
+          <a:fillRef idx="3">
+            <a:schemeClr val="accent1"/>
+          </a:fillRef>
+          <a:effectRef idx="2">
+            <a:schemeClr val="accent1"/>
+          </a:effectRef>
+          <a:fontRef idx="minor">
+            <a:schemeClr val="lt1"/>
+          </a:fontRef>
+        </p:style>
+        <p:txBody>
+          <a:bodyPr rtlCol="0" anchor="ctr"/>
+          <a:lstStyle/>
+          <a:p>
+            <a:pPr algn="ctr">
+              <a:spcAft>
+                <a:spcPts val="600"/>
+              </a:spcAft>
+            </a:pPr>
+            <a:r>
+              <a:rPr sz="2600" b="1" i="0">
+                <a:solidFill>
+                  <a:srgbClr val="84CC16"/>
+                </a:solidFill>
+                <a:latin typeface="Calibri"/>
+              </a:rPr>
+              <a:t>?</a:t>
+            </a:r>
+          </a:p>
+        </p:txBody>
+      </p:sp>
+      <p:sp>
+        <p:nvSpPr>
           <p:cNvPr id="13" name="TextBox 12"/>
           <p:cNvSpPr txBox="1"/>
           <p:nvPr/>
         </p:nvSpPr>
         <p:spPr>
           <a:xfrm>
-            <a:off x="1097280" y="5029200"/>
-            <a:ext cx="10058400" cy="640080"/>
+            <a:off x="8503920" y="3749039"/>
+            <a:ext cx="2880360" cy="1371600"/>
           </a:xfrm>
           <a:prstGeom prst="rect">
             <a:avLst/>
@@ -4119,19 +4184,51 @@
           </a:bodyPr>
           <a:lstStyle/>
           <a:p>
-            <a:pPr algn="l">
+            <a:pPr algn="ctr">
+              <a:spcAft>
+                <a:spcPts val="300"/>
+              </a:spcAft>
+            </a:pPr>
+            <a:r>
+              <a:rPr sz="1600" b="1" i="0">
+                <a:solidFill>
+                  <a:srgbClr val="1B2B3A"/>
+                </a:solidFill>
+                <a:latin typeface="Calibri"/>
+              </a:rPr>
+              <a:t>Prénom Nom</a:t>
+            </a:r>
+          </a:p>
+          <a:p>
+            <a:pPr algn="ctr">
               <a:spcAft>
                 <a:spcPts val="600"/>
               </a:spcAft>
             </a:pPr>
             <a:r>
-              <a:rPr sz="1800" b="1" i="0">
-                <a:solidFill>
-                  <a:srgbClr val="FFFFFF"/>
-                </a:solidFill>
-                <a:latin typeface="Calibri"/>
-              </a:rPr>
-              <a:t>Montant recherché : ___  M€   ·   Horizon : ___ mois de runway   ·   Objectif : ___ ARR</a:t>
+              <a:rPr sz="1300" b="0" i="0">
+                <a:solidFill>
+                  <a:srgbClr val="84CC16"/>
+                </a:solidFill>
+                <a:latin typeface="Calibri"/>
+              </a:rPr>
+              <a:t>Rôle</a:t>
+            </a:r>
+          </a:p>
+          <a:p>
+            <a:pPr algn="ctr">
+              <a:spcAft>
+                <a:spcPts val="600"/>
+              </a:spcAft>
+            </a:pPr>
+            <a:r>
+              <a:rPr sz="1150" b="0" i="0">
+                <a:solidFill>
+                  <a:srgbClr val="647485"/>
+                </a:solidFill>
+                <a:latin typeface="Calibri"/>
+              </a:rPr>
+              <a:t>Expérience clé, réalisations</a:t>
             </a:r>
           </a:p>
         </p:txBody>
@@ -4144,7 +4241,7 @@
         </p:nvSpPr>
         <p:spPr>
           <a:xfrm>
-            <a:off x="822960" y="5989320"/>
+            <a:off x="822960" y="5806440"/>
             <a:ext cx="10543032" cy="457200"/>
           </a:xfrm>
           <a:prstGeom prst="roundRect">
@@ -4190,7 +4287,7 @@
                 </a:solidFill>
                 <a:latin typeface="Calibri"/>
               </a:rPr>
-              <a:t>À COMPLÉTER — définir le montant, la valorisation visée et les jalons financés (objectifs chiffrés)</a:t>
+              <a:t>À COMPLÉTER — renseigner les fondateurs, rôles et parcours (produit/tech/commerce) et conseillers éventuels</a:t>
             </a:r>
           </a:p>
         </p:txBody>
@@ -4229,7 +4326,7 @@
                 </a:solidFill>
                 <a:latin typeface="Calibri"/>
               </a:rPr>
-              <a:t>10</a:t>
+              <a:t>9</a:t>
             </a:r>
           </a:p>
         </p:txBody>
@@ -4342,6 +4439,688 @@
       </p:sp>
       <p:sp>
         <p:nvSpPr>
+          <p:cNvPr id="4" name="Rounded Rectangle 3"/>
+          <p:cNvSpPr/>
+          <p:nvPr/>
+        </p:nvSpPr>
+        <p:spPr>
+          <a:xfrm>
+            <a:off x="822960" y="594360"/>
+            <a:ext cx="1554480" cy="384048"/>
+          </a:xfrm>
+          <a:prstGeom prst="roundRect">
+            <a:avLst/>
+          </a:prstGeom>
+          <a:solidFill>
+            <a:srgbClr val="84CC16"/>
+          </a:solidFill>
+          <a:ln>
+            <a:noFill/>
+          </a:ln>
+          <a:effectLst/>
+        </p:spPr>
+        <p:style>
+          <a:lnRef idx="1">
+            <a:schemeClr val="accent1"/>
+          </a:lnRef>
+          <a:fillRef idx="3">
+            <a:schemeClr val="accent1"/>
+          </a:fillRef>
+          <a:effectRef idx="2">
+            <a:schemeClr val="accent1"/>
+          </a:effectRef>
+          <a:fontRef idx="minor">
+            <a:schemeClr val="lt1"/>
+          </a:fontRef>
+        </p:style>
+        <p:txBody>
+          <a:bodyPr rtlCol="0" anchor="ctr" wrap="square"/>
+          <a:lstStyle/>
+          <a:p>
+            <a:pPr algn="ctr">
+              <a:spcAft>
+                <a:spcPts val="600"/>
+              </a:spcAft>
+            </a:pPr>
+            <a:r>
+              <a:rPr sz="1100" b="1" i="0">
+                <a:solidFill>
+                  <a:srgbClr val="1B2B3A"/>
+                </a:solidFill>
+                <a:latin typeface="Calibri"/>
+              </a:rPr>
+              <a:t>LEVÉE</a:t>
+            </a:r>
+          </a:p>
+        </p:txBody>
+      </p:sp>
+      <p:sp>
+        <p:nvSpPr>
+          <p:cNvPr id="5" name="TextBox 4"/>
+          <p:cNvSpPr txBox="1"/>
+          <p:nvPr/>
+        </p:nvSpPr>
+        <p:spPr>
+          <a:xfrm>
+            <a:off x="822960" y="1005840"/>
+            <a:ext cx="10515600" cy="914400"/>
+          </a:xfrm>
+          <a:prstGeom prst="rect">
+            <a:avLst/>
+          </a:prstGeom>
+          <a:noFill/>
+        </p:spPr>
+        <p:txBody>
+          <a:bodyPr wrap="square">
+            <a:spAutoFit/>
+          </a:bodyPr>
+          <a:lstStyle/>
+          <a:p>
+            <a:pPr algn="l">
+              <a:spcAft>
+                <a:spcPts val="600"/>
+              </a:spcAft>
+            </a:pPr>
+            <a:r>
+              <a:rPr sz="3000" b="1" i="0">
+                <a:solidFill>
+                  <a:srgbClr val="FFFFFF"/>
+                </a:solidFill>
+                <a:latin typeface="Calibri"/>
+              </a:rPr>
+              <a:t>Financement recherché &amp; usage des fonds</a:t>
+            </a:r>
+          </a:p>
+        </p:txBody>
+      </p:sp>
+      <p:sp>
+        <p:nvSpPr>
+          <p:cNvPr id="6" name="Rounded Rectangle 5"/>
+          <p:cNvSpPr/>
+          <p:nvPr/>
+        </p:nvSpPr>
+        <p:spPr>
+          <a:xfrm>
+            <a:off x="822960" y="2377440"/>
+            <a:ext cx="3502152" cy="2011680"/>
+          </a:xfrm>
+          <a:prstGeom prst="roundRect">
+            <a:avLst/>
+          </a:prstGeom>
+          <a:solidFill>
+            <a:srgbClr val="0F1720"/>
+          </a:solidFill>
+          <a:ln>
+            <a:noFill/>
+          </a:ln>
+          <a:effectLst/>
+        </p:spPr>
+        <p:style>
+          <a:lnRef idx="1">
+            <a:schemeClr val="accent1"/>
+          </a:lnRef>
+          <a:fillRef idx="3">
+            <a:schemeClr val="accent1"/>
+          </a:fillRef>
+          <a:effectRef idx="2">
+            <a:schemeClr val="accent1"/>
+          </a:effectRef>
+          <a:fontRef idx="minor">
+            <a:schemeClr val="lt1"/>
+          </a:fontRef>
+        </p:style>
+        <p:txBody>
+          <a:bodyPr rtlCol="0" anchor="ctr"/>
+          <a:lstStyle/>
+          <a:p>
+            <a:pPr algn="ctr"/>
+          </a:p>
+        </p:txBody>
+      </p:sp>
+      <p:sp>
+        <p:nvSpPr>
+          <p:cNvPr id="7" name="TextBox 6"/>
+          <p:cNvSpPr txBox="1"/>
+          <p:nvPr/>
+        </p:nvSpPr>
+        <p:spPr>
+          <a:xfrm>
+            <a:off x="1097280" y="2697480"/>
+            <a:ext cx="2953512" cy="1463040"/>
+          </a:xfrm>
+          <a:prstGeom prst="rect">
+            <a:avLst/>
+          </a:prstGeom>
+          <a:noFill/>
+        </p:spPr>
+        <p:txBody>
+          <a:bodyPr wrap="square">
+            <a:spAutoFit/>
+          </a:bodyPr>
+          <a:lstStyle/>
+          <a:p>
+            <a:pPr algn="l">
+              <a:spcAft>
+                <a:spcPts val="600"/>
+              </a:spcAft>
+            </a:pPr>
+            <a:r>
+              <a:rPr sz="1600" b="1" i="0">
+                <a:solidFill>
+                  <a:srgbClr val="84CC16"/>
+                </a:solidFill>
+                <a:latin typeface="Calibri"/>
+              </a:rPr>
+              <a:t>Produit &amp; Tech</a:t>
+            </a:r>
+          </a:p>
+          <a:p>
+            <a:pPr algn="l">
+              <a:spcAft>
+                <a:spcPts val="600"/>
+              </a:spcAft>
+            </a:pPr>
+            <a:r>
+              <a:rPr sz="1300" b="0" i="0">
+                <a:solidFill>
+                  <a:srgbClr val="C7D2DD"/>
+                </a:solidFill>
+                <a:latin typeface="Calibri"/>
+              </a:rPr>
+              <a:t>Facturation, mobile, intégrations, fiabilité.</a:t>
+            </a:r>
+          </a:p>
+        </p:txBody>
+      </p:sp>
+      <p:sp>
+        <p:nvSpPr>
+          <p:cNvPr id="8" name="Rounded Rectangle 7"/>
+          <p:cNvSpPr/>
+          <p:nvPr/>
+        </p:nvSpPr>
+        <p:spPr>
+          <a:xfrm>
+            <a:off x="4599432" y="2377440"/>
+            <a:ext cx="3502152" cy="2011680"/>
+          </a:xfrm>
+          <a:prstGeom prst="roundRect">
+            <a:avLst/>
+          </a:prstGeom>
+          <a:solidFill>
+            <a:srgbClr val="0F1720"/>
+          </a:solidFill>
+          <a:ln>
+            <a:noFill/>
+          </a:ln>
+          <a:effectLst/>
+        </p:spPr>
+        <p:style>
+          <a:lnRef idx="1">
+            <a:schemeClr val="accent1"/>
+          </a:lnRef>
+          <a:fillRef idx="3">
+            <a:schemeClr val="accent1"/>
+          </a:fillRef>
+          <a:effectRef idx="2">
+            <a:schemeClr val="accent1"/>
+          </a:effectRef>
+          <a:fontRef idx="minor">
+            <a:schemeClr val="lt1"/>
+          </a:fontRef>
+        </p:style>
+        <p:txBody>
+          <a:bodyPr rtlCol="0" anchor="ctr"/>
+          <a:lstStyle/>
+          <a:p>
+            <a:pPr algn="ctr"/>
+          </a:p>
+        </p:txBody>
+      </p:sp>
+      <p:sp>
+        <p:nvSpPr>
+          <p:cNvPr id="9" name="TextBox 8"/>
+          <p:cNvSpPr txBox="1"/>
+          <p:nvPr/>
+        </p:nvSpPr>
+        <p:spPr>
+          <a:xfrm>
+            <a:off x="4873752" y="2697480"/>
+            <a:ext cx="2953512" cy="1463040"/>
+          </a:xfrm>
+          <a:prstGeom prst="rect">
+            <a:avLst/>
+          </a:prstGeom>
+          <a:noFill/>
+        </p:spPr>
+        <p:txBody>
+          <a:bodyPr wrap="square">
+            <a:spAutoFit/>
+          </a:bodyPr>
+          <a:lstStyle/>
+          <a:p>
+            <a:pPr algn="l">
+              <a:spcAft>
+                <a:spcPts val="600"/>
+              </a:spcAft>
+            </a:pPr>
+            <a:r>
+              <a:rPr sz="1600" b="1" i="0">
+                <a:solidFill>
+                  <a:srgbClr val="84CC16"/>
+                </a:solidFill>
+                <a:latin typeface="Calibri"/>
+              </a:rPr>
+              <a:t>Commercial</a:t>
+            </a:r>
+          </a:p>
+          <a:p>
+            <a:pPr algn="l">
+              <a:spcAft>
+                <a:spcPts val="600"/>
+              </a:spcAft>
+            </a:pPr>
+            <a:r>
+              <a:rPr sz="1300" b="0" i="0">
+                <a:solidFill>
+                  <a:srgbClr val="C7D2DD"/>
+                </a:solidFill>
+                <a:latin typeface="Calibri"/>
+              </a:rPr>
+              <a:t>Équipe de vente et marketing pour accélérer l'acquisition.</a:t>
+            </a:r>
+          </a:p>
+        </p:txBody>
+      </p:sp>
+      <p:sp>
+        <p:nvSpPr>
+          <p:cNvPr id="10" name="Rounded Rectangle 9"/>
+          <p:cNvSpPr/>
+          <p:nvPr/>
+        </p:nvSpPr>
+        <p:spPr>
+          <a:xfrm>
+            <a:off x="8375904" y="2377440"/>
+            <a:ext cx="3502152" cy="2011680"/>
+          </a:xfrm>
+          <a:prstGeom prst="roundRect">
+            <a:avLst/>
+          </a:prstGeom>
+          <a:solidFill>
+            <a:srgbClr val="0F1720"/>
+          </a:solidFill>
+          <a:ln>
+            <a:noFill/>
+          </a:ln>
+          <a:effectLst/>
+        </p:spPr>
+        <p:style>
+          <a:lnRef idx="1">
+            <a:schemeClr val="accent1"/>
+          </a:lnRef>
+          <a:fillRef idx="3">
+            <a:schemeClr val="accent1"/>
+          </a:fillRef>
+          <a:effectRef idx="2">
+            <a:schemeClr val="accent1"/>
+          </a:effectRef>
+          <a:fontRef idx="minor">
+            <a:schemeClr val="lt1"/>
+          </a:fontRef>
+        </p:style>
+        <p:txBody>
+          <a:bodyPr rtlCol="0" anchor="ctr"/>
+          <a:lstStyle/>
+          <a:p>
+            <a:pPr algn="ctr"/>
+          </a:p>
+        </p:txBody>
+      </p:sp>
+      <p:sp>
+        <p:nvSpPr>
+          <p:cNvPr id="11" name="TextBox 10"/>
+          <p:cNvSpPr txBox="1"/>
+          <p:nvPr/>
+        </p:nvSpPr>
+        <p:spPr>
+          <a:xfrm>
+            <a:off x="8650224" y="2697480"/>
+            <a:ext cx="2953512" cy="1463040"/>
+          </a:xfrm>
+          <a:prstGeom prst="rect">
+            <a:avLst/>
+          </a:prstGeom>
+          <a:noFill/>
+        </p:spPr>
+        <p:txBody>
+          <a:bodyPr wrap="square">
+            <a:spAutoFit/>
+          </a:bodyPr>
+          <a:lstStyle/>
+          <a:p>
+            <a:pPr algn="l">
+              <a:spcAft>
+                <a:spcPts val="600"/>
+              </a:spcAft>
+            </a:pPr>
+            <a:r>
+              <a:rPr sz="1600" b="1" i="0">
+                <a:solidFill>
+                  <a:srgbClr val="84CC16"/>
+                </a:solidFill>
+                <a:latin typeface="Calibri"/>
+              </a:rPr>
+              <a:t>Support &amp; Succès client</a:t>
+            </a:r>
+          </a:p>
+          <a:p>
+            <a:pPr algn="l">
+              <a:spcAft>
+                <a:spcPts val="600"/>
+              </a:spcAft>
+            </a:pPr>
+            <a:r>
+              <a:rPr sz="1300" b="0" i="0">
+                <a:solidFill>
+                  <a:srgbClr val="C7D2DD"/>
+                </a:solidFill>
+                <a:latin typeface="Calibri"/>
+              </a:rPr>
+              <a:t>Onboarding et rétention à mesure que la base grandit.</a:t>
+            </a:r>
+          </a:p>
+        </p:txBody>
+      </p:sp>
+      <p:sp>
+        <p:nvSpPr>
+          <p:cNvPr id="12" name="Rounded Rectangle 11"/>
+          <p:cNvSpPr/>
+          <p:nvPr/>
+        </p:nvSpPr>
+        <p:spPr>
+          <a:xfrm>
+            <a:off x="822960" y="4892040"/>
+            <a:ext cx="10543032" cy="914400"/>
+          </a:xfrm>
+          <a:prstGeom prst="roundRect">
+            <a:avLst/>
+          </a:prstGeom>
+          <a:solidFill>
+            <a:srgbClr val="0F1720"/>
+          </a:solidFill>
+          <a:ln w="15875">
+            <a:solidFill>
+              <a:srgbClr val="84CC16"/>
+            </a:solidFill>
+          </a:ln>
+          <a:effectLst/>
+        </p:spPr>
+        <p:style>
+          <a:lnRef idx="1">
+            <a:schemeClr val="accent1"/>
+          </a:lnRef>
+          <a:fillRef idx="3">
+            <a:schemeClr val="accent1"/>
+          </a:fillRef>
+          <a:effectRef idx="2">
+            <a:schemeClr val="accent1"/>
+          </a:effectRef>
+          <a:fontRef idx="minor">
+            <a:schemeClr val="lt1"/>
+          </a:fontRef>
+        </p:style>
+        <p:txBody>
+          <a:bodyPr rtlCol="0" anchor="ctr"/>
+          <a:lstStyle/>
+          <a:p>
+            <a:pPr algn="ctr"/>
+          </a:p>
+        </p:txBody>
+      </p:sp>
+      <p:sp>
+        <p:nvSpPr>
+          <p:cNvPr id="13" name="TextBox 12"/>
+          <p:cNvSpPr txBox="1"/>
+          <p:nvPr/>
+        </p:nvSpPr>
+        <p:spPr>
+          <a:xfrm>
+            <a:off x="1097280" y="5029200"/>
+            <a:ext cx="10058400" cy="640080"/>
+          </a:xfrm>
+          <a:prstGeom prst="rect">
+            <a:avLst/>
+          </a:prstGeom>
+          <a:noFill/>
+        </p:spPr>
+        <p:txBody>
+          <a:bodyPr wrap="square">
+            <a:spAutoFit/>
+          </a:bodyPr>
+          <a:lstStyle/>
+          <a:p>
+            <a:pPr algn="l">
+              <a:spcAft>
+                <a:spcPts val="600"/>
+              </a:spcAft>
+            </a:pPr>
+            <a:r>
+              <a:rPr sz="1800" b="1" i="0">
+                <a:solidFill>
+                  <a:srgbClr val="FFFFFF"/>
+                </a:solidFill>
+                <a:latin typeface="Calibri"/>
+              </a:rPr>
+              <a:t>Montant recherché : ___  M€   ·   Horizon : ___ mois de runway   ·   Objectif : ___ ARR</a:t>
+            </a:r>
+          </a:p>
+        </p:txBody>
+      </p:sp>
+      <p:sp>
+        <p:nvSpPr>
+          <p:cNvPr id="14" name="Rounded Rectangle 13"/>
+          <p:cNvSpPr/>
+          <p:nvPr/>
+        </p:nvSpPr>
+        <p:spPr>
+          <a:xfrm>
+            <a:off x="822960" y="5989320"/>
+            <a:ext cx="10543032" cy="457200"/>
+          </a:xfrm>
+          <a:prstGeom prst="roundRect">
+            <a:avLst/>
+          </a:prstGeom>
+          <a:solidFill>
+            <a:srgbClr val="FFF7E0"/>
+          </a:solidFill>
+          <a:ln w="12700">
+            <a:solidFill>
+              <a:srgbClr val="E9C46A"/>
+            </a:solidFill>
+          </a:ln>
+          <a:effectLst/>
+        </p:spPr>
+        <p:style>
+          <a:lnRef idx="1">
+            <a:schemeClr val="accent1"/>
+          </a:lnRef>
+          <a:fillRef idx="3">
+            <a:schemeClr val="accent1"/>
+          </a:fillRef>
+          <a:effectRef idx="2">
+            <a:schemeClr val="accent1"/>
+          </a:effectRef>
+          <a:fontRef idx="minor">
+            <a:schemeClr val="lt1"/>
+          </a:fontRef>
+        </p:style>
+        <p:txBody>
+          <a:bodyPr rtlCol="0" anchor="ctr" wrap="square"/>
+          <a:lstStyle/>
+          <a:p>
+            <a:pPr algn="l">
+              <a:spcAft>
+                <a:spcPts val="600"/>
+              </a:spcAft>
+            </a:pPr>
+            <a:r>
+              <a:rPr sz="1050" b="1" i="0">
+                <a:solidFill>
+                  <a:srgbClr val="8A6D1E"/>
+                </a:solidFill>
+                <a:latin typeface="Calibri"/>
+              </a:rPr>
+              <a:t>À COMPLÉTER — définir le montant, la valorisation visée et les jalons financés (objectifs chiffrés)</a:t>
+            </a:r>
+          </a:p>
+        </p:txBody>
+      </p:sp>
+      <p:sp>
+        <p:nvSpPr>
+          <p:cNvPr id="15" name="TextBox 14"/>
+          <p:cNvSpPr txBox="1"/>
+          <p:nvPr/>
+        </p:nvSpPr>
+        <p:spPr>
+          <a:xfrm>
+            <a:off x="11247120" y="6419088"/>
+            <a:ext cx="822960" cy="365760"/>
+          </a:xfrm>
+          <a:prstGeom prst="rect">
+            <a:avLst/>
+          </a:prstGeom>
+          <a:noFill/>
+        </p:spPr>
+        <p:txBody>
+          <a:bodyPr wrap="square">
+            <a:spAutoFit/>
+          </a:bodyPr>
+          <a:lstStyle/>
+          <a:p>
+            <a:pPr algn="r">
+              <a:spcAft>
+                <a:spcPts val="600"/>
+              </a:spcAft>
+            </a:pPr>
+            <a:r>
+              <a:rPr sz="1000" b="0" i="0">
+                <a:solidFill>
+                  <a:srgbClr val="647485"/>
+                </a:solidFill>
+                <a:latin typeface="Calibri"/>
+              </a:rPr>
+              <a:t>10</a:t>
+            </a:r>
+          </a:p>
+        </p:txBody>
+      </p:sp>
+    </p:spTree>
+  </p:cSld>
+  <p:clrMapOvr>
+    <a:masterClrMapping/>
+  </p:clrMapOvr>
+</p:sld>
+</file>
+
+<file path=ppt/slides/slide12.xml><?xml version="1.0" encoding="utf-8"?>
+<p:sld xmlns:a="http://schemas.openxmlformats.org/drawingml/2006/main" xmlns:p="http://schemas.openxmlformats.org/presentationml/2006/main" xmlns:r="http://schemas.openxmlformats.org/officeDocument/2006/relationships">
+  <p:cSld>
+    <p:spTree>
+      <p:nvGrpSpPr>
+        <p:cNvPr id="1" name=""/>
+        <p:cNvGrpSpPr/>
+        <p:nvPr/>
+      </p:nvGrpSpPr>
+      <p:grpSpPr/>
+      <p:sp>
+        <p:nvSpPr>
+          <p:cNvPr id="2" name="Rectangle 1"/>
+          <p:cNvSpPr/>
+          <p:nvPr/>
+        </p:nvSpPr>
+        <p:spPr>
+          <a:xfrm>
+            <a:off x="0" y="0"/>
+            <a:ext cx="12191695" cy="6858000"/>
+          </a:xfrm>
+          <a:prstGeom prst="rect">
+            <a:avLst/>
+          </a:prstGeom>
+          <a:solidFill>
+            <a:srgbClr val="1B2B3A"/>
+          </a:solidFill>
+          <a:ln>
+            <a:noFill/>
+          </a:ln>
+          <a:effectLst/>
+        </p:spPr>
+        <p:style>
+          <a:lnRef idx="1">
+            <a:schemeClr val="accent1"/>
+          </a:lnRef>
+          <a:fillRef idx="3">
+            <a:schemeClr val="accent1"/>
+          </a:fillRef>
+          <a:effectRef idx="2">
+            <a:schemeClr val="accent1"/>
+          </a:effectRef>
+          <a:fontRef idx="minor">
+            <a:schemeClr val="lt1"/>
+          </a:fontRef>
+        </p:style>
+        <p:txBody>
+          <a:bodyPr rtlCol="0" anchor="ctr"/>
+          <a:lstStyle/>
+          <a:p>
+            <a:pPr algn="ctr"/>
+          </a:p>
+        </p:txBody>
+      </p:sp>
+      <p:sp>
+        <p:nvSpPr>
+          <p:cNvPr id="3" name="Rectangle 2"/>
+          <p:cNvSpPr/>
+          <p:nvPr/>
+        </p:nvSpPr>
+        <p:spPr>
+          <a:xfrm>
+            <a:off x="0" y="0"/>
+            <a:ext cx="12191695" cy="6858000"/>
+          </a:xfrm>
+          <a:prstGeom prst="rect">
+            <a:avLst/>
+          </a:prstGeom>
+          <a:solidFill>
+            <a:srgbClr val="1B2B3A"/>
+          </a:solidFill>
+          <a:ln>
+            <a:noFill/>
+          </a:ln>
+          <a:effectLst/>
+        </p:spPr>
+        <p:style>
+          <a:lnRef idx="1">
+            <a:schemeClr val="accent1"/>
+          </a:lnRef>
+          <a:fillRef idx="3">
+            <a:schemeClr val="accent1"/>
+          </a:fillRef>
+          <a:effectRef idx="2">
+            <a:schemeClr val="accent1"/>
+          </a:effectRef>
+          <a:fontRef idx="minor">
+            <a:schemeClr val="lt1"/>
+          </a:fontRef>
+        </p:style>
+        <p:txBody>
+          <a:bodyPr rtlCol="0" anchor="ctr"/>
+          <a:lstStyle/>
+          <a:p>
+            <a:pPr algn="ctr"/>
+          </a:p>
+        </p:txBody>
+      </p:sp>
+      <p:sp>
+        <p:nvSpPr>
           <p:cNvPr id="4" name="Rectangle 3"/>
           <p:cNvSpPr/>
           <p:nvPr/>
@@ -6920,7 +7699,7 @@
             <a:avLst/>
           </a:prstGeom>
           <a:solidFill>
-            <a:srgbClr val="1B2B3A"/>
+            <a:srgbClr val="FFFFFF"/>
           </a:solidFill>
           <a:ln>
             <a:noFill/>
@@ -6951,16 +7730,16 @@
       </p:sp>
       <p:sp>
         <p:nvSpPr>
-          <p:cNvPr id="3" name="Rectangle 2"/>
+          <p:cNvPr id="3" name="Rounded Rectangle 2"/>
           <p:cNvSpPr/>
           <p:nvPr/>
         </p:nvSpPr>
         <p:spPr>
           <a:xfrm>
-            <a:off x="0" y="0"/>
-            <a:ext cx="12191695" cy="6858000"/>
-          </a:xfrm>
-          <a:prstGeom prst="rect">
+            <a:off x="822960" y="594360"/>
+            <a:ext cx="2286000" cy="384048"/>
+          </a:xfrm>
+          <a:prstGeom prst="roundRect">
             <a:avLst/>
           </a:prstGeom>
           <a:solidFill>
@@ -6986,29 +7765,81 @@
           </a:fontRef>
         </p:style>
         <p:txBody>
-          <a:bodyPr rtlCol="0" anchor="ctr"/>
-          <a:lstStyle/>
-          <a:p>
-            <a:pPr algn="ctr"/>
-          </a:p>
-        </p:txBody>
-      </p:sp>
-      <p:sp>
-        <p:nvSpPr>
-          <p:cNvPr id="4" name="Rounded Rectangle 3"/>
+          <a:bodyPr rtlCol="0" anchor="ctr" wrap="square"/>
+          <a:lstStyle/>
+          <a:p>
+            <a:pPr algn="ctr">
+              <a:spcAft>
+                <a:spcPts val="600"/>
+              </a:spcAft>
+            </a:pPr>
+            <a:r>
+              <a:rPr sz="1100" b="1" i="0">
+                <a:solidFill>
+                  <a:srgbClr val="FFFFFF"/>
+                </a:solidFill>
+                <a:latin typeface="Calibri"/>
+              </a:rPr>
+              <a:t>ENTERPRISE-READY</a:t>
+            </a:r>
+          </a:p>
+        </p:txBody>
+      </p:sp>
+      <p:sp>
+        <p:nvSpPr>
+          <p:cNvPr id="4" name="TextBox 3"/>
+          <p:cNvSpPr txBox="1"/>
+          <p:nvPr/>
+        </p:nvSpPr>
+        <p:spPr>
+          <a:xfrm>
+            <a:off x="822960" y="1005840"/>
+            <a:ext cx="10515600" cy="914400"/>
+          </a:xfrm>
+          <a:prstGeom prst="rect">
+            <a:avLst/>
+          </a:prstGeom>
+          <a:noFill/>
+        </p:spPr>
+        <p:txBody>
+          <a:bodyPr wrap="square">
+            <a:spAutoFit/>
+          </a:bodyPr>
+          <a:lstStyle/>
+          <a:p>
+            <a:pPr algn="l">
+              <a:spcAft>
+                <a:spcPts val="600"/>
+              </a:spcAft>
+            </a:pPr>
+            <a:r>
+              <a:rPr sz="3000" b="1" i="0">
+                <a:solidFill>
+                  <a:srgbClr val="1B2B3A"/>
+                </a:solidFill>
+                <a:latin typeface="Calibri"/>
+              </a:rPr>
+              <a:t>Prêt pour les grands comptes</a:t>
+            </a:r>
+          </a:p>
+        </p:txBody>
+      </p:sp>
+      <p:sp>
+        <p:nvSpPr>
+          <p:cNvPr id="5" name="Rounded Rectangle 4"/>
           <p:cNvSpPr/>
           <p:nvPr/>
         </p:nvSpPr>
         <p:spPr>
           <a:xfrm>
-            <a:off x="822960" y="594360"/>
-            <a:ext cx="2377440" cy="384048"/>
+            <a:off x="822960" y="2148840"/>
+            <a:ext cx="3383280" cy="868680"/>
           </a:xfrm>
           <a:prstGeom prst="roundRect">
             <a:avLst/>
           </a:prstGeom>
           <a:solidFill>
-            <a:srgbClr val="84CC16"/>
+            <a:srgbClr val="1B2B3A"/>
           </a:solidFill>
           <a:ln>
             <a:noFill/>
@@ -7030,36 +7861,23 @@
           </a:fontRef>
         </p:style>
         <p:txBody>
-          <a:bodyPr rtlCol="0" anchor="ctr" wrap="square"/>
-          <a:lstStyle/>
-          <a:p>
-            <a:pPr algn="ctr">
-              <a:spcAft>
-                <a:spcPts val="600"/>
-              </a:spcAft>
-            </a:pPr>
-            <a:r>
-              <a:rPr sz="1100" b="1" i="0">
-                <a:solidFill>
-                  <a:srgbClr val="1B2B3A"/>
-                </a:solidFill>
-                <a:latin typeface="Calibri"/>
-              </a:rPr>
-              <a:t>BUSINESS MODEL</a:t>
-            </a:r>
-          </a:p>
-        </p:txBody>
-      </p:sp>
-      <p:sp>
-        <p:nvSpPr>
-          <p:cNvPr id="5" name="TextBox 4"/>
+          <a:bodyPr rtlCol="0" anchor="ctr"/>
+          <a:lstStyle/>
+          <a:p>
+            <a:pPr algn="ctr"/>
+          </a:p>
+        </p:txBody>
+      </p:sp>
+      <p:sp>
+        <p:nvSpPr>
+          <p:cNvPr id="6" name="TextBox 5"/>
           <p:cNvSpPr txBox="1"/>
           <p:nvPr/>
         </p:nvSpPr>
         <p:spPr>
           <a:xfrm>
-            <a:off x="822960" y="1005840"/>
-            <a:ext cx="10515600" cy="914400"/>
+            <a:off x="1005840" y="2350008"/>
+            <a:ext cx="3108960" cy="548640"/>
           </a:xfrm>
           <a:prstGeom prst="rect">
             <a:avLst/>
@@ -7078,52 +7896,13 @@
               </a:spcAft>
             </a:pPr>
             <a:r>
-              <a:rPr sz="3000" b="1" i="0">
-                <a:solidFill>
-                  <a:srgbClr val="FFFFFF"/>
-                </a:solidFill>
-                <a:latin typeface="Calibri"/>
-              </a:rPr>
-              <a:t>SaaS par licence + modules, revenu extensible</a:t>
-            </a:r>
-          </a:p>
-        </p:txBody>
-      </p:sp>
-      <p:sp>
-        <p:nvSpPr>
-          <p:cNvPr id="6" name="TextBox 5"/>
-          <p:cNvSpPr txBox="1"/>
-          <p:nvPr/>
-        </p:nvSpPr>
-        <p:spPr>
-          <a:xfrm>
-            <a:off x="822960" y="1965960"/>
-            <a:ext cx="10515600" cy="640080"/>
-          </a:xfrm>
-          <a:prstGeom prst="rect">
-            <a:avLst/>
-          </a:prstGeom>
-          <a:noFill/>
-        </p:spPr>
-        <p:txBody>
-          <a:bodyPr wrap="square">
-            <a:spAutoFit/>
-          </a:bodyPr>
-          <a:lstStyle/>
-          <a:p>
-            <a:pPr algn="l">
-              <a:spcAft>
-                <a:spcPts val="600"/>
-              </a:spcAft>
-            </a:pPr>
-            <a:r>
-              <a:rPr sz="1500" b="0" i="0">
-                <a:solidFill>
-                  <a:srgbClr val="C7D2DD"/>
-                </a:solidFill>
-                <a:latin typeface="Calibri"/>
-              </a:rPr>
-              <a:t>Chaque utilisateur = une licence mensuelle selon son rôle. La valeur croît avec la taille de l'équipe (land &amp; expand).</a:t>
+              <a:rPr sz="1400" b="1" i="0">
+                <a:solidFill>
+                  <a:srgbClr val="84CC16"/>
+                </a:solidFill>
+                <a:latin typeface="Calibri"/>
+              </a:rPr>
+              <a:t>Multi-BU 6 niveaux</a:t>
             </a:r>
           </a:p>
         </p:txBody>
@@ -7136,17 +7915,19 @@
         </p:nvSpPr>
         <p:spPr>
           <a:xfrm>
-            <a:off x="822960" y="2834640"/>
-            <a:ext cx="2011680" cy="1371600"/>
+            <a:off x="4343400" y="2148840"/>
+            <a:ext cx="7040880" cy="868680"/>
           </a:xfrm>
           <a:prstGeom prst="roundRect">
             <a:avLst/>
           </a:prstGeom>
           <a:solidFill>
-            <a:srgbClr val="0F1720"/>
-          </a:solidFill>
-          <a:ln>
-            <a:noFill/>
+            <a:srgbClr val="F7F9FB"/>
+          </a:solidFill>
+          <a:ln w="12700">
+            <a:solidFill>
+              <a:srgbClr val="E2E8F0"/>
+            </a:solidFill>
           </a:ln>
           <a:effectLst/>
         </p:spPr>
@@ -7180,8 +7961,8 @@
         </p:nvSpPr>
         <p:spPr>
           <a:xfrm>
-            <a:off x="960120" y="3090672"/>
-            <a:ext cx="1737360" cy="914400"/>
+            <a:off x="4572000" y="2276856"/>
+            <a:ext cx="6675120" cy="685800"/>
           </a:xfrm>
           <a:prstGeom prst="rect">
             <a:avLst/>
@@ -7194,51 +7975,19 @@
           </a:bodyPr>
           <a:lstStyle/>
           <a:p>
-            <a:pPr algn="ctr">
-              <a:spcAft>
-                <a:spcPts val="200"/>
-              </a:spcAft>
-            </a:pPr>
-            <a:r>
-              <a:rPr sz="2500" b="1" i="0">
-                <a:solidFill>
-                  <a:srgbClr val="84CC16"/>
-                </a:solidFill>
-                <a:latin typeface="Calibri"/>
-              </a:rPr>
-              <a:t>8 €</a:t>
-            </a:r>
-          </a:p>
-          <a:p>
-            <a:pPr algn="ctr">
+            <a:pPr algn="l">
               <a:spcAft>
                 <a:spcPts val="600"/>
               </a:spcAft>
             </a:pPr>
             <a:r>
-              <a:rPr sz="1200" b="0" i="0">
-                <a:solidFill>
-                  <a:srgbClr val="C7D2DD"/>
-                </a:solidFill>
-                <a:latin typeface="Calibri"/>
-              </a:rPr>
-              <a:t>Utilisateur</a:t>
-            </a:r>
-          </a:p>
-          <a:p>
-            <a:pPr algn="ctr">
-              <a:spcAft>
-                <a:spcPts val="600"/>
-              </a:spcAft>
-            </a:pPr>
-            <a:r>
-              <a:rPr sz="1000" b="0" i="0">
-                <a:solidFill>
-                  <a:srgbClr val="647485"/>
-                </a:solidFill>
-                <a:latin typeface="Calibri"/>
-              </a:rPr>
-              <a:t>/ mois</a:t>
+              <a:rPr sz="1250" b="0" i="0">
+                <a:solidFill>
+                  <a:srgbClr val="1B2B3A"/>
+                </a:solidFill>
+                <a:latin typeface="Calibri"/>
+              </a:rPr>
+              <a:t>Hiérarchie Monde › région › agence › équipe, héritage automatique — indispensable aux groupes.</a:t>
             </a:r>
           </a:p>
         </p:txBody>
@@ -7251,14 +8000,14 @@
         </p:nvSpPr>
         <p:spPr>
           <a:xfrm>
-            <a:off x="2971800" y="2834640"/>
-            <a:ext cx="2011680" cy="1371600"/>
+            <a:off x="822960" y="3172968"/>
+            <a:ext cx="3383280" cy="868680"/>
           </a:xfrm>
           <a:prstGeom prst="roundRect">
             <a:avLst/>
           </a:prstGeom>
           <a:solidFill>
-            <a:srgbClr val="0F1720"/>
+            <a:srgbClr val="1B2B3A"/>
           </a:solidFill>
           <a:ln>
             <a:noFill/>
@@ -7295,8 +8044,8 @@
         </p:nvSpPr>
         <p:spPr>
           <a:xfrm>
-            <a:off x="3108960" y="3090672"/>
-            <a:ext cx="1737360" cy="914400"/>
+            <a:off x="1005840" y="3374136"/>
+            <a:ext cx="3108960" cy="548640"/>
           </a:xfrm>
           <a:prstGeom prst="rect">
             <a:avLst/>
@@ -7309,51 +8058,19 @@
           </a:bodyPr>
           <a:lstStyle/>
           <a:p>
-            <a:pPr algn="ctr">
-              <a:spcAft>
-                <a:spcPts val="200"/>
-              </a:spcAft>
-            </a:pPr>
-            <a:r>
-              <a:rPr sz="2500" b="1" i="0">
+            <a:pPr algn="l">
+              <a:spcAft>
+                <a:spcPts val="600"/>
+              </a:spcAft>
+            </a:pPr>
+            <a:r>
+              <a:rPr sz="1400" b="1" i="0">
                 <a:solidFill>
                   <a:srgbClr val="84CC16"/>
                 </a:solidFill>
                 <a:latin typeface="Calibri"/>
               </a:rPr>
-              <a:t>22 €</a:t>
-            </a:r>
-          </a:p>
-          <a:p>
-            <a:pPr algn="ctr">
-              <a:spcAft>
-                <a:spcPts val="600"/>
-              </a:spcAft>
-            </a:pPr>
-            <a:r>
-              <a:rPr sz="1200" b="0" i="0">
-                <a:solidFill>
-                  <a:srgbClr val="C7D2DD"/>
-                </a:solidFill>
-                <a:latin typeface="Calibri"/>
-              </a:rPr>
-              <a:t>Recruteur / BM</a:t>
-            </a:r>
-          </a:p>
-          <a:p>
-            <a:pPr algn="ctr">
-              <a:spcAft>
-                <a:spcPts val="600"/>
-              </a:spcAft>
-            </a:pPr>
-            <a:r>
-              <a:rPr sz="1000" b="0" i="0">
-                <a:solidFill>
-                  <a:srgbClr val="647485"/>
-                </a:solidFill>
-                <a:latin typeface="Calibri"/>
-              </a:rPr>
-              <a:t>/ mois</a:t>
+              <a:t>Pilotage financier</a:t>
             </a:r>
           </a:p>
         </p:txBody>
@@ -7366,17 +8083,19 @@
         </p:nvSpPr>
         <p:spPr>
           <a:xfrm>
-            <a:off x="5120640" y="2834640"/>
-            <a:ext cx="2011680" cy="1371600"/>
+            <a:off x="4343400" y="3172968"/>
+            <a:ext cx="7040880" cy="868680"/>
           </a:xfrm>
           <a:prstGeom prst="roundRect">
             <a:avLst/>
           </a:prstGeom>
           <a:solidFill>
-            <a:srgbClr val="0F1720"/>
-          </a:solidFill>
-          <a:ln>
-            <a:noFill/>
+            <a:srgbClr val="F7F9FB"/>
+          </a:solidFill>
+          <a:ln w="12700">
+            <a:solidFill>
+              <a:srgbClr val="E2E8F0"/>
+            </a:solidFill>
           </a:ln>
           <a:effectLst/>
         </p:spPr>
@@ -7410,8 +8129,8 @@
         </p:nvSpPr>
         <p:spPr>
           <a:xfrm>
-            <a:off x="5257800" y="3090672"/>
-            <a:ext cx="1737360" cy="914400"/>
+            <a:off x="4572000" y="3300984"/>
+            <a:ext cx="6675120" cy="685800"/>
           </a:xfrm>
           <a:prstGeom prst="rect">
             <a:avLst/>
@@ -7424,51 +8143,19 @@
           </a:bodyPr>
           <a:lstStyle/>
           <a:p>
-            <a:pPr algn="ctr">
-              <a:spcAft>
-                <a:spcPts val="200"/>
-              </a:spcAft>
-            </a:pPr>
-            <a:r>
-              <a:rPr sz="2500" b="1" i="0">
-                <a:solidFill>
-                  <a:srgbClr val="84CC16"/>
-                </a:solidFill>
-                <a:latin typeface="Calibri"/>
-              </a:rPr>
-              <a:t>29 €</a:t>
-            </a:r>
-          </a:p>
-          <a:p>
-            <a:pPr algn="ctr">
+            <a:pPr algn="l">
               <a:spcAft>
                 <a:spcPts val="600"/>
               </a:spcAft>
             </a:pPr>
             <a:r>
-              <a:rPr sz="1200" b="0" i="0">
-                <a:solidFill>
-                  <a:srgbClr val="C7D2DD"/>
-                </a:solidFill>
-                <a:latin typeface="Calibri"/>
-              </a:rPr>
-              <a:t>Gestionnaire</a:t>
-            </a:r>
-          </a:p>
-          <a:p>
-            <a:pPr algn="ctr">
-              <a:spcAft>
-                <a:spcPts val="600"/>
-              </a:spcAft>
-            </a:pPr>
-            <a:r>
-              <a:rPr sz="1000" b="0" i="0">
-                <a:solidFill>
-                  <a:srgbClr val="647485"/>
-                </a:solidFill>
-                <a:latin typeface="Calibri"/>
-              </a:rPr>
-              <a:t>/ mois</a:t>
+              <a:rPr sz="1250" b="0" i="0">
+                <a:solidFill>
+                  <a:srgbClr val="1B2B3A"/>
+                </a:solidFill>
+                <a:latin typeface="Calibri"/>
+              </a:rPr>
+              <a:t>Prévisionnel de CA 12 mois et marge consolidée par BU / Practice.</a:t>
             </a:r>
           </a:p>
         </p:txBody>
@@ -7481,14 +8168,14 @@
         </p:nvSpPr>
         <p:spPr>
           <a:xfrm>
-            <a:off x="7269480" y="2834640"/>
-            <a:ext cx="2011680" cy="1371600"/>
+            <a:off x="822960" y="4197096"/>
+            <a:ext cx="3383280" cy="868680"/>
           </a:xfrm>
           <a:prstGeom prst="roundRect">
             <a:avLst/>
           </a:prstGeom>
           <a:solidFill>
-            <a:srgbClr val="0F1720"/>
+            <a:srgbClr val="1B2B3A"/>
           </a:solidFill>
           <a:ln>
             <a:noFill/>
@@ -7525,8 +8212,8 @@
         </p:nvSpPr>
         <p:spPr>
           <a:xfrm>
-            <a:off x="7406640" y="3090672"/>
-            <a:ext cx="1737360" cy="914400"/>
+            <a:off x="1005840" y="4398264"/>
+            <a:ext cx="3108960" cy="548640"/>
           </a:xfrm>
           <a:prstGeom prst="rect">
             <a:avLst/>
@@ -7539,51 +8226,19 @@
           </a:bodyPr>
           <a:lstStyle/>
           <a:p>
-            <a:pPr algn="ctr">
-              <a:spcAft>
-                <a:spcPts val="200"/>
-              </a:spcAft>
-            </a:pPr>
-            <a:r>
-              <a:rPr sz="2500" b="1" i="0">
+            <a:pPr algn="l">
+              <a:spcAft>
+                <a:spcPts val="600"/>
+              </a:spcAft>
+            </a:pPr>
+            <a:r>
+              <a:rPr sz="1400" b="1" i="0">
                 <a:solidFill>
                   <a:srgbClr val="84CC16"/>
                 </a:solidFill>
                 <a:latin typeface="Calibri"/>
               </a:rPr>
-              <a:t>39 €</a:t>
-            </a:r>
-          </a:p>
-          <a:p>
-            <a:pPr algn="ctr">
-              <a:spcAft>
-                <a:spcPts val="600"/>
-              </a:spcAft>
-            </a:pPr>
-            <a:r>
-              <a:rPr sz="1200" b="0" i="0">
-                <a:solidFill>
-                  <a:srgbClr val="C7D2DD"/>
-                </a:solidFill>
-                <a:latin typeface="Calibri"/>
-              </a:rPr>
-              <a:t>Admin</a:t>
-            </a:r>
-          </a:p>
-          <a:p>
-            <a:pPr algn="ctr">
-              <a:spcAft>
-                <a:spcPts val="600"/>
-              </a:spcAft>
-            </a:pPr>
-            <a:r>
-              <a:rPr sz="1000" b="0" i="0">
-                <a:solidFill>
-                  <a:srgbClr val="647485"/>
-                </a:solidFill>
-                <a:latin typeface="Calibri"/>
-              </a:rPr>
-              <a:t>/ mois</a:t>
+              <a:t>Sécurité auditée</a:t>
             </a:r>
           </a:p>
         </p:txBody>
@@ -7596,17 +8251,19 @@
         </p:nvSpPr>
         <p:spPr>
           <a:xfrm>
-            <a:off x="9418320" y="2834640"/>
-            <a:ext cx="2011680" cy="1371600"/>
+            <a:off x="4343400" y="4197096"/>
+            <a:ext cx="7040880" cy="868680"/>
           </a:xfrm>
           <a:prstGeom prst="roundRect">
             <a:avLst/>
           </a:prstGeom>
           <a:solidFill>
-            <a:srgbClr val="0F1720"/>
-          </a:solidFill>
-          <a:ln>
-            <a:noFill/>
+            <a:srgbClr val="F7F9FB"/>
+          </a:solidFill>
+          <a:ln w="12700">
+            <a:solidFill>
+              <a:srgbClr val="E2E8F0"/>
+            </a:solidFill>
           </a:ln>
           <a:effectLst/>
         </p:spPr>
@@ -7640,8 +8297,8 @@
         </p:nvSpPr>
         <p:spPr>
           <a:xfrm>
-            <a:off x="9555480" y="3090672"/>
-            <a:ext cx="1737360" cy="914400"/>
+            <a:off x="4572000" y="4325112"/>
+            <a:ext cx="6675120" cy="685800"/>
           </a:xfrm>
           <a:prstGeom prst="rect">
             <a:avLst/>
@@ -7654,51 +8311,19 @@
           </a:bodyPr>
           <a:lstStyle/>
           <a:p>
-            <a:pPr algn="ctr">
-              <a:spcAft>
-                <a:spcPts val="200"/>
-              </a:spcAft>
-            </a:pPr>
-            <a:r>
-              <a:rPr sz="2500" b="1" i="0">
-                <a:solidFill>
-                  <a:srgbClr val="84CC16"/>
-                </a:solidFill>
-                <a:latin typeface="Calibri"/>
-              </a:rPr>
-              <a:t>49 €</a:t>
-            </a:r>
-          </a:p>
-          <a:p>
-            <a:pPr algn="ctr">
+            <a:pPr algn="l">
               <a:spcAft>
                 <a:spcPts val="600"/>
               </a:spcAft>
             </a:pPr>
             <a:r>
-              <a:rPr sz="1200" b="0" i="0">
-                <a:solidFill>
-                  <a:srgbClr val="C7D2DD"/>
-                </a:solidFill>
-                <a:latin typeface="Calibri"/>
-              </a:rPr>
-              <a:t>Super Admin</a:t>
-            </a:r>
-          </a:p>
-          <a:p>
-            <a:pPr algn="ctr">
-              <a:spcAft>
-                <a:spcPts val="600"/>
-              </a:spcAft>
-            </a:pPr>
-            <a:r>
-              <a:rPr sz="1000" b="0" i="0">
-                <a:solidFill>
-                  <a:srgbClr val="647485"/>
-                </a:solidFill>
-                <a:latin typeface="Calibri"/>
-              </a:rPr>
-              <a:t>/ mois</a:t>
+              <a:rPr sz="1250" b="0" i="0">
+                <a:solidFill>
+                  <a:srgbClr val="1B2B3A"/>
+                </a:solidFill>
+                <a:latin typeface="Calibri"/>
+              </a:rPr>
+              <a:t>Isolation RLS auditée, journal d'audit, permissions fines — RGPD.</a:t>
             </a:r>
           </a:p>
         </p:txBody>
@@ -7711,19 +8336,17 @@
         </p:nvSpPr>
         <p:spPr>
           <a:xfrm>
-            <a:off x="822960" y="4572000"/>
-            <a:ext cx="3502152" cy="1463040"/>
+            <a:off x="822960" y="5221224"/>
+            <a:ext cx="3383280" cy="868680"/>
           </a:xfrm>
           <a:prstGeom prst="roundRect">
             <a:avLst/>
           </a:prstGeom>
           <a:solidFill>
-            <a:srgbClr val="0F1720"/>
-          </a:solidFill>
-          <a:ln w="12700">
-            <a:solidFill>
-              <a:srgbClr val="2A3B4C"/>
-            </a:solidFill>
+            <a:srgbClr val="1B2B3A"/>
+          </a:solidFill>
+          <a:ln>
+            <a:noFill/>
           </a:ln>
           <a:effectLst/>
         </p:spPr>
@@ -7757,8 +8380,8 @@
         </p:nvSpPr>
         <p:spPr>
           <a:xfrm>
-            <a:off x="1097280" y="4800600"/>
-            <a:ext cx="2953512" cy="1097280"/>
+            <a:off x="1005840" y="5422392"/>
+            <a:ext cx="3108960" cy="548640"/>
           </a:xfrm>
           <a:prstGeom prst="rect">
             <a:avLst/>
@@ -7773,7 +8396,7 @@
           <a:p>
             <a:pPr algn="l">
               <a:spcAft>
-                <a:spcPts val="400"/>
+                <a:spcPts val="600"/>
               </a:spcAft>
             </a:pPr>
             <a:r>
@@ -7783,23 +8406,7 @@
                 </a:solidFill>
                 <a:latin typeface="Calibri"/>
               </a:rPr>
-              <a:t>Expansion par sièges</a:t>
-            </a:r>
-          </a:p>
-          <a:p>
-            <a:pPr algn="l">
-              <a:spcAft>
-                <a:spcPts val="600"/>
-              </a:spcAft>
-            </a:pPr>
-            <a:r>
-              <a:rPr sz="1200" b="0" i="0">
-                <a:solidFill>
-                  <a:srgbClr val="C7D2DD"/>
-                </a:solidFill>
-                <a:latin typeface="Calibri"/>
-              </a:rPr>
-              <a:t>le revenu par compte augmente à chaque consultant ajouté.</a:t>
+              <a:t>Recrutement data-driven</a:t>
             </a:r>
           </a:p>
         </p:txBody>
@@ -7812,18 +8419,18 @@
         </p:nvSpPr>
         <p:spPr>
           <a:xfrm>
-            <a:off x="4599432" y="4572000"/>
-            <a:ext cx="3502152" cy="1463040"/>
+            <a:off x="4343400" y="5221224"/>
+            <a:ext cx="7040880" cy="868680"/>
           </a:xfrm>
           <a:prstGeom prst="roundRect">
             <a:avLst/>
           </a:prstGeom>
           <a:solidFill>
-            <a:srgbClr val="0F1720"/>
+            <a:srgbClr val="F7F9FB"/>
           </a:solidFill>
           <a:ln w="12700">
             <a:solidFill>
-              <a:srgbClr val="2A3B4C"/>
+              <a:srgbClr val="E2E8F0"/>
             </a:solidFill>
           </a:ln>
           <a:effectLst/>
@@ -7858,8 +8465,8 @@
         </p:nvSpPr>
         <p:spPr>
           <a:xfrm>
-            <a:off x="4873752" y="4800600"/>
-            <a:ext cx="2953512" cy="1097280"/>
+            <a:off x="4572000" y="5349240"/>
+            <a:ext cx="6675120" cy="685800"/>
           </a:xfrm>
           <a:prstGeom prst="rect">
             <a:avLst/>
@@ -7874,141 +8481,24 @@
           <a:p>
             <a:pPr algn="l">
               <a:spcAft>
-                <a:spcPts val="400"/>
-              </a:spcAft>
-            </a:pPr>
-            <a:r>
-              <a:rPr sz="1400" b="1" i="0">
-                <a:solidFill>
-                  <a:srgbClr val="84CC16"/>
-                </a:solidFill>
-                <a:latin typeface="Calibri"/>
-              </a:rPr>
-              <a:t>Modules add-on</a:t>
-            </a:r>
-          </a:p>
-          <a:p>
-            <a:pPr algn="l">
-              <a:spcAft>
                 <a:spcPts val="600"/>
               </a:spcAft>
             </a:pPr>
             <a:r>
-              <a:rPr sz="1200" b="0" i="0">
-                <a:solidFill>
-                  <a:srgbClr val="C7D2DD"/>
-                </a:solidFill>
-                <a:latin typeface="Calibri"/>
-              </a:rPr>
-              <a:t>Recrutement et Business Développement : +59 €/mois par entreprise chacun.</a:t>
-            </a:r>
-          </a:p>
-        </p:txBody>
-      </p:sp>
-      <p:sp>
-        <p:nvSpPr>
-          <p:cNvPr id="21" name="Rounded Rectangle 20"/>
-          <p:cNvSpPr/>
-          <p:nvPr/>
-        </p:nvSpPr>
-        <p:spPr>
-          <a:xfrm>
-            <a:off x="8375904" y="4572000"/>
-            <a:ext cx="3502152" cy="1463040"/>
-          </a:xfrm>
-          <a:prstGeom prst="roundRect">
-            <a:avLst/>
-          </a:prstGeom>
-          <a:solidFill>
-            <a:srgbClr val="0F1720"/>
-          </a:solidFill>
-          <a:ln w="12700">
-            <a:solidFill>
-              <a:srgbClr val="2A3B4C"/>
-            </a:solidFill>
-          </a:ln>
-          <a:effectLst/>
-        </p:spPr>
-        <p:style>
-          <a:lnRef idx="1">
-            <a:schemeClr val="accent1"/>
-          </a:lnRef>
-          <a:fillRef idx="3">
-            <a:schemeClr val="accent1"/>
-          </a:fillRef>
-          <a:effectRef idx="2">
-            <a:schemeClr val="accent1"/>
-          </a:effectRef>
-          <a:fontRef idx="minor">
-            <a:schemeClr val="lt1"/>
-          </a:fontRef>
-        </p:style>
-        <p:txBody>
-          <a:bodyPr rtlCol="0" anchor="ctr"/>
-          <a:lstStyle/>
-          <a:p>
-            <a:pPr algn="ctr"/>
-          </a:p>
-        </p:txBody>
-      </p:sp>
-      <p:sp>
-        <p:nvSpPr>
-          <p:cNvPr id="22" name="TextBox 21"/>
-          <p:cNvSpPr txBox="1"/>
-          <p:nvPr/>
-        </p:nvSpPr>
-        <p:spPr>
-          <a:xfrm>
-            <a:off x="8650224" y="4800600"/>
-            <a:ext cx="2953512" cy="1097280"/>
-          </a:xfrm>
-          <a:prstGeom prst="rect">
-            <a:avLst/>
-          </a:prstGeom>
-          <a:noFill/>
-        </p:spPr>
-        <p:txBody>
-          <a:bodyPr wrap="square">
-            <a:spAutoFit/>
-          </a:bodyPr>
-          <a:lstStyle/>
-          <a:p>
-            <a:pPr algn="l">
-              <a:spcAft>
-                <a:spcPts val="400"/>
-              </a:spcAft>
-            </a:pPr>
-            <a:r>
-              <a:rPr sz="1400" b="1" i="0">
-                <a:solidFill>
-                  <a:srgbClr val="84CC16"/>
-                </a:solidFill>
-                <a:latin typeface="Calibri"/>
-              </a:rPr>
-              <a:t>Annuel</a:t>
-            </a:r>
-          </a:p>
-          <a:p>
-            <a:pPr algn="l">
-              <a:spcAft>
-                <a:spcPts val="600"/>
-              </a:spcAft>
-            </a:pPr>
-            <a:r>
-              <a:rPr sz="1200" b="0" i="0">
-                <a:solidFill>
-                  <a:srgbClr val="C7D2DD"/>
-                </a:solidFill>
-                <a:latin typeface="Calibri"/>
-              </a:rPr>
-              <a:t>engagement annuel avec 2 mois offerts → trésorerie et rétention.</a:t>
-            </a:r>
-          </a:p>
-        </p:txBody>
-      </p:sp>
-      <p:sp>
-        <p:nvSpPr>
-          <p:cNvPr id="23" name="TextBox 22"/>
+              <a:rPr sz="1250" b="0" i="0">
+                <a:solidFill>
+                  <a:srgbClr val="1B2B3A"/>
+                </a:solidFill>
+                <a:latin typeface="Calibri"/>
+              </a:rPr>
+              <a:t>Pipeline partagé + matching multi-critères (expertise, localisation, mobilité, expérience).</a:t>
+            </a:r>
+          </a:p>
+        </p:txBody>
+      </p:sp>
+      <p:sp>
+        <p:nvSpPr>
+          <p:cNvPr id="21" name="TextBox 20"/>
           <p:cNvSpPr txBox="1"/>
           <p:nvPr/>
         </p:nvSpPr>
@@ -8078,7 +8568,7 @@
             <a:avLst/>
           </a:prstGeom>
           <a:solidFill>
-            <a:srgbClr val="FFFFFF"/>
+            <a:srgbClr val="1B2B3A"/>
           </a:solidFill>
           <a:ln>
             <a:noFill/>
@@ -8109,16 +8599,16 @@
       </p:sp>
       <p:sp>
         <p:nvSpPr>
-          <p:cNvPr id="3" name="Rounded Rectangle 2"/>
+          <p:cNvPr id="3" name="Rectangle 2"/>
           <p:cNvSpPr/>
           <p:nvPr/>
         </p:nvSpPr>
         <p:spPr>
           <a:xfrm>
-            <a:off x="822960" y="594360"/>
-            <a:ext cx="2286000" cy="384048"/>
-          </a:xfrm>
-          <a:prstGeom prst="roundRect">
+            <a:off x="0" y="0"/>
+            <a:ext cx="12191695" cy="6858000"/>
+          </a:xfrm>
+          <a:prstGeom prst="rect">
             <a:avLst/>
           </a:prstGeom>
           <a:solidFill>
@@ -8144,86 +8634,32 @@
           </a:fontRef>
         </p:style>
         <p:txBody>
-          <a:bodyPr rtlCol="0" anchor="ctr" wrap="square"/>
-          <a:lstStyle/>
-          <a:p>
-            <a:pPr algn="ctr">
-              <a:spcAft>
-                <a:spcPts val="600"/>
-              </a:spcAft>
-            </a:pPr>
-            <a:r>
-              <a:rPr sz="1100" b="1" i="0">
-                <a:solidFill>
-                  <a:srgbClr val="FFFFFF"/>
-                </a:solidFill>
-                <a:latin typeface="Calibri"/>
-              </a:rPr>
-              <a:t>GO-TO-MARKET</a:t>
-            </a:r>
-          </a:p>
-        </p:txBody>
-      </p:sp>
-      <p:sp>
-        <p:nvSpPr>
-          <p:cNvPr id="4" name="TextBox 3"/>
-          <p:cNvSpPr txBox="1"/>
-          <p:nvPr/>
-        </p:nvSpPr>
-        <p:spPr>
-          <a:xfrm>
-            <a:off x="822960" y="1005840"/>
-            <a:ext cx="10515600" cy="914400"/>
-          </a:xfrm>
-          <a:prstGeom prst="rect">
-            <a:avLst/>
-          </a:prstGeom>
-          <a:noFill/>
-        </p:spPr>
-        <p:txBody>
-          <a:bodyPr wrap="square">
-            <a:spAutoFit/>
-          </a:bodyPr>
-          <a:lstStyle/>
-          <a:p>
-            <a:pPr algn="l">
-              <a:spcAft>
-                <a:spcPts val="600"/>
-              </a:spcAft>
-            </a:pPr>
-            <a:r>
-              <a:rPr sz="3000" b="1" i="0">
-                <a:solidFill>
-                  <a:srgbClr val="1B2B3A"/>
-                </a:solidFill>
-                <a:latin typeface="Calibri"/>
-              </a:rPr>
-              <a:t>Deux moteurs d'acquisition complémentaires</a:t>
-            </a:r>
-          </a:p>
-        </p:txBody>
-      </p:sp>
-      <p:sp>
-        <p:nvSpPr>
-          <p:cNvPr id="5" name="Rounded Rectangle 4"/>
+          <a:bodyPr rtlCol="0" anchor="ctr"/>
+          <a:lstStyle/>
+          <a:p>
+            <a:pPr algn="ctr"/>
+          </a:p>
+        </p:txBody>
+      </p:sp>
+      <p:sp>
+        <p:nvSpPr>
+          <p:cNvPr id="4" name="Rounded Rectangle 3"/>
           <p:cNvSpPr/>
           <p:nvPr/>
         </p:nvSpPr>
         <p:spPr>
           <a:xfrm>
-            <a:off x="822960" y="2194560"/>
-            <a:ext cx="5349240" cy="2377440"/>
+            <a:off x="822960" y="594360"/>
+            <a:ext cx="2377440" cy="384048"/>
           </a:xfrm>
           <a:prstGeom prst="roundRect">
             <a:avLst/>
           </a:prstGeom>
           <a:solidFill>
-            <a:srgbClr val="F7F9FB"/>
-          </a:solidFill>
-          <a:ln w="12700">
-            <a:solidFill>
-              <a:srgbClr val="E2E8F0"/>
-            </a:solidFill>
+            <a:srgbClr val="84CC16"/>
+          </a:solidFill>
+          <a:ln>
+            <a:noFill/>
           </a:ln>
           <a:effectLst/>
         </p:spPr>
@@ -8242,29 +8678,120 @@
           </a:fontRef>
         </p:style>
         <p:txBody>
-          <a:bodyPr rtlCol="0" anchor="ctr"/>
-          <a:lstStyle/>
-          <a:p>
-            <a:pPr algn="ctr"/>
-          </a:p>
-        </p:txBody>
-      </p:sp>
-      <p:sp>
-        <p:nvSpPr>
-          <p:cNvPr id="6" name="Rounded Rectangle 5"/>
+          <a:bodyPr rtlCol="0" anchor="ctr" wrap="square"/>
+          <a:lstStyle/>
+          <a:p>
+            <a:pPr algn="ctr">
+              <a:spcAft>
+                <a:spcPts val="600"/>
+              </a:spcAft>
+            </a:pPr>
+            <a:r>
+              <a:rPr sz="1100" b="1" i="0">
+                <a:solidFill>
+                  <a:srgbClr val="1B2B3A"/>
+                </a:solidFill>
+                <a:latin typeface="Calibri"/>
+              </a:rPr>
+              <a:t>BUSINESS MODEL</a:t>
+            </a:r>
+          </a:p>
+        </p:txBody>
+      </p:sp>
+      <p:sp>
+        <p:nvSpPr>
+          <p:cNvPr id="5" name="TextBox 4"/>
+          <p:cNvSpPr txBox="1"/>
+          <p:nvPr/>
+        </p:nvSpPr>
+        <p:spPr>
+          <a:xfrm>
+            <a:off x="822960" y="1005840"/>
+            <a:ext cx="10515600" cy="914400"/>
+          </a:xfrm>
+          <a:prstGeom prst="rect">
+            <a:avLst/>
+          </a:prstGeom>
+          <a:noFill/>
+        </p:spPr>
+        <p:txBody>
+          <a:bodyPr wrap="square">
+            <a:spAutoFit/>
+          </a:bodyPr>
+          <a:lstStyle/>
+          <a:p>
+            <a:pPr algn="l">
+              <a:spcAft>
+                <a:spcPts val="600"/>
+              </a:spcAft>
+            </a:pPr>
+            <a:r>
+              <a:rPr sz="3000" b="1" i="0">
+                <a:solidFill>
+                  <a:srgbClr val="FFFFFF"/>
+                </a:solidFill>
+                <a:latin typeface="Calibri"/>
+              </a:rPr>
+              <a:t>SaaS par licence + modules, revenu extensible</a:t>
+            </a:r>
+          </a:p>
+        </p:txBody>
+      </p:sp>
+      <p:sp>
+        <p:nvSpPr>
+          <p:cNvPr id="6" name="TextBox 5"/>
+          <p:cNvSpPr txBox="1"/>
+          <p:nvPr/>
+        </p:nvSpPr>
+        <p:spPr>
+          <a:xfrm>
+            <a:off x="822960" y="1965960"/>
+            <a:ext cx="10515600" cy="640080"/>
+          </a:xfrm>
+          <a:prstGeom prst="rect">
+            <a:avLst/>
+          </a:prstGeom>
+          <a:noFill/>
+        </p:spPr>
+        <p:txBody>
+          <a:bodyPr wrap="square">
+            <a:spAutoFit/>
+          </a:bodyPr>
+          <a:lstStyle/>
+          <a:p>
+            <a:pPr algn="l">
+              <a:spcAft>
+                <a:spcPts val="600"/>
+              </a:spcAft>
+            </a:pPr>
+            <a:r>
+              <a:rPr sz="1500" b="0" i="0">
+                <a:solidFill>
+                  <a:srgbClr val="C7D2DD"/>
+                </a:solidFill>
+                <a:latin typeface="Calibri"/>
+              </a:rPr>
+              <a:t>Chaque utilisateur = une licence mensuelle selon son rôle. La valeur croît avec la taille de l'équipe (land &amp; expand).</a:t>
+            </a:r>
+          </a:p>
+        </p:txBody>
+      </p:sp>
+      <p:sp>
+        <p:nvSpPr>
+          <p:cNvPr id="7" name="Rounded Rectangle 6"/>
           <p:cNvSpPr/>
           <p:nvPr/>
         </p:nvSpPr>
         <p:spPr>
           <a:xfrm>
-            <a:off x="1188720" y="2514600"/>
-            <a:ext cx="2194560" cy="384048"/>
+            <a:off x="822960" y="2834640"/>
+            <a:ext cx="2011680" cy="1371600"/>
           </a:xfrm>
           <a:prstGeom prst="roundRect">
             <a:avLst/>
           </a:prstGeom>
           <a:solidFill>
-            <a:srgbClr val="1B2B3A"/>
+            <a:srgbClr val="0F1720"/>
           </a:solidFill>
           <a:ln>
             <a:noFill/>
@@ -8286,36 +8813,23 @@
           </a:fontRef>
         </p:style>
         <p:txBody>
-          <a:bodyPr rtlCol="0" anchor="ctr" wrap="square"/>
-          <a:lstStyle/>
-          <a:p>
-            <a:pPr algn="ctr">
-              <a:spcAft>
-                <a:spcPts val="600"/>
-              </a:spcAft>
-            </a:pPr>
-            <a:r>
-              <a:rPr sz="1100" b="1" i="0">
-                <a:solidFill>
-                  <a:srgbClr val="FFFFFF"/>
-                </a:solidFill>
-                <a:latin typeface="Calibri"/>
-              </a:rPr>
-              <a:t>SELF-SERVICE</a:t>
-            </a:r>
-          </a:p>
-        </p:txBody>
-      </p:sp>
-      <p:sp>
-        <p:nvSpPr>
-          <p:cNvPr id="7" name="TextBox 6"/>
+          <a:bodyPr rtlCol="0" anchor="ctr"/>
+          <a:lstStyle/>
+          <a:p>
+            <a:pPr algn="ctr"/>
+          </a:p>
+        </p:txBody>
+      </p:sp>
+      <p:sp>
+        <p:nvSpPr>
+          <p:cNvPr id="8" name="TextBox 7"/>
           <p:cNvSpPr txBox="1"/>
           <p:nvPr/>
         </p:nvSpPr>
         <p:spPr>
           <a:xfrm>
-            <a:off x="1188720" y="3108960"/>
-            <a:ext cx="4617720" cy="1280160"/>
+            <a:off x="960120" y="3090672"/>
+            <a:ext cx="1737360" cy="914400"/>
           </a:xfrm>
           <a:prstGeom prst="rect">
             <a:avLst/>
@@ -8328,60 +8842,74 @@
           </a:bodyPr>
           <a:lstStyle/>
           <a:p>
-            <a:pPr algn="l">
-              <a:spcAft>
-                <a:spcPts val="800"/>
-              </a:spcAft>
-            </a:pPr>
-            <a:r>
-              <a:rPr sz="1900" b="1" i="0">
-                <a:solidFill>
-                  <a:srgbClr val="1B2B3A"/>
-                </a:solidFill>
-                <a:latin typeface="Calibri"/>
-              </a:rPr>
-              <a:t>Libre-service</a:t>
-            </a:r>
-          </a:p>
-          <a:p>
-            <a:pPr algn="l">
+            <a:pPr algn="ctr">
+              <a:spcAft>
+                <a:spcPts val="200"/>
+              </a:spcAft>
+            </a:pPr>
+            <a:r>
+              <a:rPr sz="2500" b="1" i="0">
+                <a:solidFill>
+                  <a:srgbClr val="84CC16"/>
+                </a:solidFill>
+                <a:latin typeface="Calibri"/>
+              </a:rPr>
+              <a:t>8 €</a:t>
+            </a:r>
+          </a:p>
+          <a:p>
+            <a:pPr algn="ctr">
               <a:spcAft>
                 <a:spcPts val="600"/>
               </a:spcAft>
             </a:pPr>
             <a:r>
-              <a:rPr sz="1350" b="0" i="0">
+              <a:rPr sz="1200" b="0" i="0">
+                <a:solidFill>
+                  <a:srgbClr val="C7D2DD"/>
+                </a:solidFill>
+                <a:latin typeface="Calibri"/>
+              </a:rPr>
+              <a:t>Utilisateur</a:t>
+            </a:r>
+          </a:p>
+          <a:p>
+            <a:pPr algn="ctr">
+              <a:spcAft>
+                <a:spcPts val="600"/>
+              </a:spcAft>
+            </a:pPr>
+            <a:r>
+              <a:rPr sz="1000" b="0" i="0">
                 <a:solidFill>
                   <a:srgbClr val="647485"/>
                 </a:solidFill>
                 <a:latin typeface="Calibri"/>
               </a:rPr>
-              <a:t>Tarifs publics et souscription en ligne : l'ESN crée son espace, importe son équipe et paie en autonomie. Coût d'acquisition faible, cycle court.</a:t>
-            </a:r>
-          </a:p>
-        </p:txBody>
-      </p:sp>
-      <p:sp>
-        <p:nvSpPr>
-          <p:cNvPr id="8" name="Rounded Rectangle 7"/>
+              <a:t>/ mois</a:t>
+            </a:r>
+          </a:p>
+        </p:txBody>
+      </p:sp>
+      <p:sp>
+        <p:nvSpPr>
+          <p:cNvPr id="9" name="Rounded Rectangle 8"/>
           <p:cNvSpPr/>
           <p:nvPr/>
         </p:nvSpPr>
         <p:spPr>
           <a:xfrm>
-            <a:off x="6492240" y="2194560"/>
-            <a:ext cx="5349240" cy="2377440"/>
+            <a:off x="2971800" y="2834640"/>
+            <a:ext cx="2011680" cy="1371600"/>
           </a:xfrm>
           <a:prstGeom prst="roundRect">
             <a:avLst/>
           </a:prstGeom>
           <a:solidFill>
-            <a:srgbClr val="F7F9FB"/>
-          </a:solidFill>
-          <a:ln w="12700">
-            <a:solidFill>
-              <a:srgbClr val="E2E8F0"/>
-            </a:solidFill>
+            <a:srgbClr val="0F1720"/>
+          </a:solidFill>
+          <a:ln>
+            <a:noFill/>
           </a:ln>
           <a:effectLst/>
         </p:spPr>
@@ -8409,20 +8937,91 @@
       </p:sp>
       <p:sp>
         <p:nvSpPr>
-          <p:cNvPr id="9" name="Rounded Rectangle 8"/>
+          <p:cNvPr id="10" name="TextBox 9"/>
+          <p:cNvSpPr txBox="1"/>
+          <p:nvPr/>
+        </p:nvSpPr>
+        <p:spPr>
+          <a:xfrm>
+            <a:off x="3108960" y="3090672"/>
+            <a:ext cx="1737360" cy="914400"/>
+          </a:xfrm>
+          <a:prstGeom prst="rect">
+            <a:avLst/>
+          </a:prstGeom>
+          <a:noFill/>
+        </p:spPr>
+        <p:txBody>
+          <a:bodyPr wrap="square">
+            <a:spAutoFit/>
+          </a:bodyPr>
+          <a:lstStyle/>
+          <a:p>
+            <a:pPr algn="ctr">
+              <a:spcAft>
+                <a:spcPts val="200"/>
+              </a:spcAft>
+            </a:pPr>
+            <a:r>
+              <a:rPr sz="2500" b="1" i="0">
+                <a:solidFill>
+                  <a:srgbClr val="84CC16"/>
+                </a:solidFill>
+                <a:latin typeface="Calibri"/>
+              </a:rPr>
+              <a:t>22 €</a:t>
+            </a:r>
+          </a:p>
+          <a:p>
+            <a:pPr algn="ctr">
+              <a:spcAft>
+                <a:spcPts val="600"/>
+              </a:spcAft>
+            </a:pPr>
+            <a:r>
+              <a:rPr sz="1200" b="0" i="0">
+                <a:solidFill>
+                  <a:srgbClr val="C7D2DD"/>
+                </a:solidFill>
+                <a:latin typeface="Calibri"/>
+              </a:rPr>
+              <a:t>Recruteur / BM</a:t>
+            </a:r>
+          </a:p>
+          <a:p>
+            <a:pPr algn="ctr">
+              <a:spcAft>
+                <a:spcPts val="600"/>
+              </a:spcAft>
+            </a:pPr>
+            <a:r>
+              <a:rPr sz="1000" b="0" i="0">
+                <a:solidFill>
+                  <a:srgbClr val="647485"/>
+                </a:solidFill>
+                <a:latin typeface="Calibri"/>
+              </a:rPr>
+              <a:t>/ mois</a:t>
+            </a:r>
+          </a:p>
+        </p:txBody>
+      </p:sp>
+      <p:sp>
+        <p:nvSpPr>
+          <p:cNvPr id="11" name="Rounded Rectangle 10"/>
           <p:cNvSpPr/>
           <p:nvPr/>
         </p:nvSpPr>
         <p:spPr>
           <a:xfrm>
-            <a:off x="6858000" y="2514600"/>
-            <a:ext cx="2194560" cy="384048"/>
+            <a:off x="5120640" y="2834640"/>
+            <a:ext cx="2011680" cy="1371600"/>
           </a:xfrm>
           <a:prstGeom prst="roundRect">
             <a:avLst/>
           </a:prstGeom>
           <a:solidFill>
-            <a:srgbClr val="1B2B3A"/>
+            <a:srgbClr val="0F1720"/>
           </a:solidFill>
           <a:ln>
             <a:noFill/>
@@ -8444,36 +9043,23 @@
           </a:fontRef>
         </p:style>
         <p:txBody>
-          <a:bodyPr rtlCol="0" anchor="ctr" wrap="square"/>
-          <a:lstStyle/>
-          <a:p>
-            <a:pPr algn="ctr">
-              <a:spcAft>
-                <a:spcPts val="600"/>
-              </a:spcAft>
-            </a:pPr>
-            <a:r>
-              <a:rPr sz="1100" b="1" i="0">
-                <a:solidFill>
-                  <a:srgbClr val="FFFFFF"/>
-                </a:solidFill>
-                <a:latin typeface="Calibri"/>
-              </a:rPr>
-              <a:t>SALES-LED</a:t>
-            </a:r>
-          </a:p>
-        </p:txBody>
-      </p:sp>
-      <p:sp>
-        <p:nvSpPr>
-          <p:cNvPr id="10" name="TextBox 9"/>
+          <a:bodyPr rtlCol="0" anchor="ctr"/>
+          <a:lstStyle/>
+          <a:p>
+            <a:pPr algn="ctr"/>
+          </a:p>
+        </p:txBody>
+      </p:sp>
+      <p:sp>
+        <p:nvSpPr>
+          <p:cNvPr id="12" name="TextBox 11"/>
           <p:cNvSpPr txBox="1"/>
           <p:nvPr/>
         </p:nvSpPr>
         <p:spPr>
           <a:xfrm>
-            <a:off x="6858000" y="3108960"/>
-            <a:ext cx="4617720" cy="1280160"/>
+            <a:off x="5257800" y="3090672"/>
+            <a:ext cx="1737360" cy="914400"/>
           </a:xfrm>
           <a:prstGeom prst="rect">
             <a:avLst/>
@@ -8486,99 +9072,74 @@
           </a:bodyPr>
           <a:lstStyle/>
           <a:p>
-            <a:pPr algn="l">
-              <a:spcAft>
-                <a:spcPts val="800"/>
-              </a:spcAft>
-            </a:pPr>
-            <a:r>
-              <a:rPr sz="1900" b="1" i="0">
-                <a:solidFill>
-                  <a:srgbClr val="1B2B3A"/>
-                </a:solidFill>
-                <a:latin typeface="Calibri"/>
-              </a:rPr>
-              <a:t>Vente consultative</a:t>
-            </a:r>
-          </a:p>
-          <a:p>
-            <a:pPr algn="l">
+            <a:pPr algn="ctr">
+              <a:spcAft>
+                <a:spcPts val="200"/>
+              </a:spcAft>
+            </a:pPr>
+            <a:r>
+              <a:rPr sz="2500" b="1" i="0">
+                <a:solidFill>
+                  <a:srgbClr val="84CC16"/>
+                </a:solidFill>
+                <a:latin typeface="Calibri"/>
+              </a:rPr>
+              <a:t>29 €</a:t>
+            </a:r>
+          </a:p>
+          <a:p>
+            <a:pPr algn="ctr">
               <a:spcAft>
                 <a:spcPts val="600"/>
               </a:spcAft>
             </a:pPr>
             <a:r>
-              <a:rPr sz="1350" b="0" i="0">
+              <a:rPr sz="1200" b="0" i="0">
+                <a:solidFill>
+                  <a:srgbClr val="C7D2DD"/>
+                </a:solidFill>
+                <a:latin typeface="Calibri"/>
+              </a:rPr>
+              <a:t>Gestionnaire</a:t>
+            </a:r>
+          </a:p>
+          <a:p>
+            <a:pPr algn="ctr">
+              <a:spcAft>
+                <a:spcPts val="600"/>
+              </a:spcAft>
+            </a:pPr>
+            <a:r>
+              <a:rPr sz="1000" b="0" i="0">
                 <a:solidFill>
                   <a:srgbClr val="647485"/>
                 </a:solidFill>
                 <a:latin typeface="Calibri"/>
               </a:rPr>
-              <a:t>Pour les organisations plus grandes : démonstration avec leurs données, accompagnement à la migration et à l'onboarding.</a:t>
-            </a:r>
-          </a:p>
-        </p:txBody>
-      </p:sp>
-      <p:sp>
-        <p:nvSpPr>
-          <p:cNvPr id="11" name="TextBox 10"/>
-          <p:cNvSpPr txBox="1"/>
-          <p:nvPr/>
-        </p:nvSpPr>
-        <p:spPr>
-          <a:xfrm>
-            <a:off x="822960" y="4800600"/>
-            <a:ext cx="10515600" cy="914400"/>
-          </a:xfrm>
-          <a:prstGeom prst="rect">
-            <a:avLst/>
-          </a:prstGeom>
-          <a:noFill/>
-        </p:spPr>
-        <p:txBody>
-          <a:bodyPr wrap="square">
-            <a:spAutoFit/>
-          </a:bodyPr>
-          <a:lstStyle/>
-          <a:p>
-            <a:pPr algn="l">
-              <a:spcAft>
-                <a:spcPts val="600"/>
-              </a:spcAft>
-            </a:pPr>
-            <a:r>
-              <a:rPr sz="1350" b="0" i="1">
-                <a:solidFill>
-                  <a:srgbClr val="647485"/>
-                </a:solidFill>
-                <a:latin typeface="Calibri"/>
-              </a:rPr>
-              <a:t>Leviers : référencement du site vitrine, démonstration en un clic, et effet de recommandation intra-secteur (les dirigeants d'ESN se connaissent).</a:t>
-            </a:r>
-          </a:p>
-        </p:txBody>
-      </p:sp>
-      <p:sp>
-        <p:nvSpPr>
-          <p:cNvPr id="12" name="Rounded Rectangle 11"/>
+              <a:t>/ mois</a:t>
+            </a:r>
+          </a:p>
+        </p:txBody>
+      </p:sp>
+      <p:sp>
+        <p:nvSpPr>
+          <p:cNvPr id="13" name="Rounded Rectangle 12"/>
           <p:cNvSpPr/>
           <p:nvPr/>
         </p:nvSpPr>
         <p:spPr>
           <a:xfrm>
-            <a:off x="822960" y="5852160"/>
-            <a:ext cx="10543032" cy="457200"/>
+            <a:off x="7269480" y="2834640"/>
+            <a:ext cx="2011680" cy="1371600"/>
           </a:xfrm>
           <a:prstGeom prst="roundRect">
             <a:avLst/>
           </a:prstGeom>
           <a:solidFill>
-            <a:srgbClr val="FFF7E0"/>
-          </a:solidFill>
-          <a:ln w="12700">
-            <a:solidFill>
-              <a:srgbClr val="E9C46A"/>
-            </a:solidFill>
+            <a:srgbClr val="0F1720"/>
+          </a:solidFill>
+          <a:ln>
+            <a:noFill/>
           </a:ln>
           <a:effectLst/>
         </p:spPr>
@@ -8597,36 +9158,23 @@
           </a:fontRef>
         </p:style>
         <p:txBody>
-          <a:bodyPr rtlCol="0" anchor="ctr" wrap="square"/>
-          <a:lstStyle/>
-          <a:p>
-            <a:pPr algn="l">
-              <a:spcAft>
-                <a:spcPts val="600"/>
-              </a:spcAft>
-            </a:pPr>
-            <a:r>
-              <a:rPr sz="1050" b="1" i="0">
-                <a:solidFill>
-                  <a:srgbClr val="8A6D1E"/>
-                </a:solidFill>
-                <a:latin typeface="Calibri"/>
-              </a:rPr>
-              <a:t>À COMPLÉTER — ajouter vos canaux réels (LinkedIn, partenariats, salons) et le CAC/LTV visés</a:t>
-            </a:r>
-          </a:p>
-        </p:txBody>
-      </p:sp>
-      <p:sp>
-        <p:nvSpPr>
-          <p:cNvPr id="13" name="TextBox 12"/>
+          <a:bodyPr rtlCol="0" anchor="ctr"/>
+          <a:lstStyle/>
+          <a:p>
+            <a:pPr algn="ctr"/>
+          </a:p>
+        </p:txBody>
+      </p:sp>
+      <p:sp>
+        <p:nvSpPr>
+          <p:cNvPr id="14" name="TextBox 13"/>
           <p:cNvSpPr txBox="1"/>
           <p:nvPr/>
         </p:nvSpPr>
         <p:spPr>
           <a:xfrm>
-            <a:off x="11247120" y="6419088"/>
-            <a:ext cx="822960" cy="365760"/>
+            <a:off x="7406640" y="3090672"/>
+            <a:ext cx="1737360" cy="914400"/>
           </a:xfrm>
           <a:prstGeom prst="rect">
             <a:avLst/>
@@ -8639,6 +9187,495 @@
           </a:bodyPr>
           <a:lstStyle/>
           <a:p>
+            <a:pPr algn="ctr">
+              <a:spcAft>
+                <a:spcPts val="200"/>
+              </a:spcAft>
+            </a:pPr>
+            <a:r>
+              <a:rPr sz="2500" b="1" i="0">
+                <a:solidFill>
+                  <a:srgbClr val="84CC16"/>
+                </a:solidFill>
+                <a:latin typeface="Calibri"/>
+              </a:rPr>
+              <a:t>39 €</a:t>
+            </a:r>
+          </a:p>
+          <a:p>
+            <a:pPr algn="ctr">
+              <a:spcAft>
+                <a:spcPts val="600"/>
+              </a:spcAft>
+            </a:pPr>
+            <a:r>
+              <a:rPr sz="1200" b="0" i="0">
+                <a:solidFill>
+                  <a:srgbClr val="C7D2DD"/>
+                </a:solidFill>
+                <a:latin typeface="Calibri"/>
+              </a:rPr>
+              <a:t>Admin</a:t>
+            </a:r>
+          </a:p>
+          <a:p>
+            <a:pPr algn="ctr">
+              <a:spcAft>
+                <a:spcPts val="600"/>
+              </a:spcAft>
+            </a:pPr>
+            <a:r>
+              <a:rPr sz="1000" b="0" i="0">
+                <a:solidFill>
+                  <a:srgbClr val="647485"/>
+                </a:solidFill>
+                <a:latin typeface="Calibri"/>
+              </a:rPr>
+              <a:t>/ mois</a:t>
+            </a:r>
+          </a:p>
+        </p:txBody>
+      </p:sp>
+      <p:sp>
+        <p:nvSpPr>
+          <p:cNvPr id="15" name="Rounded Rectangle 14"/>
+          <p:cNvSpPr/>
+          <p:nvPr/>
+        </p:nvSpPr>
+        <p:spPr>
+          <a:xfrm>
+            <a:off x="9418320" y="2834640"/>
+            <a:ext cx="2011680" cy="1371600"/>
+          </a:xfrm>
+          <a:prstGeom prst="roundRect">
+            <a:avLst/>
+          </a:prstGeom>
+          <a:solidFill>
+            <a:srgbClr val="0F1720"/>
+          </a:solidFill>
+          <a:ln>
+            <a:noFill/>
+          </a:ln>
+          <a:effectLst/>
+        </p:spPr>
+        <p:style>
+          <a:lnRef idx="1">
+            <a:schemeClr val="accent1"/>
+          </a:lnRef>
+          <a:fillRef idx="3">
+            <a:schemeClr val="accent1"/>
+          </a:fillRef>
+          <a:effectRef idx="2">
+            <a:schemeClr val="accent1"/>
+          </a:effectRef>
+          <a:fontRef idx="minor">
+            <a:schemeClr val="lt1"/>
+          </a:fontRef>
+        </p:style>
+        <p:txBody>
+          <a:bodyPr rtlCol="0" anchor="ctr"/>
+          <a:lstStyle/>
+          <a:p>
+            <a:pPr algn="ctr"/>
+          </a:p>
+        </p:txBody>
+      </p:sp>
+      <p:sp>
+        <p:nvSpPr>
+          <p:cNvPr id="16" name="TextBox 15"/>
+          <p:cNvSpPr txBox="1"/>
+          <p:nvPr/>
+        </p:nvSpPr>
+        <p:spPr>
+          <a:xfrm>
+            <a:off x="9555480" y="3090672"/>
+            <a:ext cx="1737360" cy="914400"/>
+          </a:xfrm>
+          <a:prstGeom prst="rect">
+            <a:avLst/>
+          </a:prstGeom>
+          <a:noFill/>
+        </p:spPr>
+        <p:txBody>
+          <a:bodyPr wrap="square">
+            <a:spAutoFit/>
+          </a:bodyPr>
+          <a:lstStyle/>
+          <a:p>
+            <a:pPr algn="ctr">
+              <a:spcAft>
+                <a:spcPts val="200"/>
+              </a:spcAft>
+            </a:pPr>
+            <a:r>
+              <a:rPr sz="2500" b="1" i="0">
+                <a:solidFill>
+                  <a:srgbClr val="84CC16"/>
+                </a:solidFill>
+                <a:latin typeface="Calibri"/>
+              </a:rPr>
+              <a:t>49 €</a:t>
+            </a:r>
+          </a:p>
+          <a:p>
+            <a:pPr algn="ctr">
+              <a:spcAft>
+                <a:spcPts val="600"/>
+              </a:spcAft>
+            </a:pPr>
+            <a:r>
+              <a:rPr sz="1200" b="0" i="0">
+                <a:solidFill>
+                  <a:srgbClr val="C7D2DD"/>
+                </a:solidFill>
+                <a:latin typeface="Calibri"/>
+              </a:rPr>
+              <a:t>Super Admin</a:t>
+            </a:r>
+          </a:p>
+          <a:p>
+            <a:pPr algn="ctr">
+              <a:spcAft>
+                <a:spcPts val="600"/>
+              </a:spcAft>
+            </a:pPr>
+            <a:r>
+              <a:rPr sz="1000" b="0" i="0">
+                <a:solidFill>
+                  <a:srgbClr val="647485"/>
+                </a:solidFill>
+                <a:latin typeface="Calibri"/>
+              </a:rPr>
+              <a:t>/ mois</a:t>
+            </a:r>
+          </a:p>
+        </p:txBody>
+      </p:sp>
+      <p:sp>
+        <p:nvSpPr>
+          <p:cNvPr id="17" name="Rounded Rectangle 16"/>
+          <p:cNvSpPr/>
+          <p:nvPr/>
+        </p:nvSpPr>
+        <p:spPr>
+          <a:xfrm>
+            <a:off x="822960" y="4572000"/>
+            <a:ext cx="3502152" cy="1463040"/>
+          </a:xfrm>
+          <a:prstGeom prst="roundRect">
+            <a:avLst/>
+          </a:prstGeom>
+          <a:solidFill>
+            <a:srgbClr val="0F1720"/>
+          </a:solidFill>
+          <a:ln w="12700">
+            <a:solidFill>
+              <a:srgbClr val="2A3B4C"/>
+            </a:solidFill>
+          </a:ln>
+          <a:effectLst/>
+        </p:spPr>
+        <p:style>
+          <a:lnRef idx="1">
+            <a:schemeClr val="accent1"/>
+          </a:lnRef>
+          <a:fillRef idx="3">
+            <a:schemeClr val="accent1"/>
+          </a:fillRef>
+          <a:effectRef idx="2">
+            <a:schemeClr val="accent1"/>
+          </a:effectRef>
+          <a:fontRef idx="minor">
+            <a:schemeClr val="lt1"/>
+          </a:fontRef>
+        </p:style>
+        <p:txBody>
+          <a:bodyPr rtlCol="0" anchor="ctr"/>
+          <a:lstStyle/>
+          <a:p>
+            <a:pPr algn="ctr"/>
+          </a:p>
+        </p:txBody>
+      </p:sp>
+      <p:sp>
+        <p:nvSpPr>
+          <p:cNvPr id="18" name="TextBox 17"/>
+          <p:cNvSpPr txBox="1"/>
+          <p:nvPr/>
+        </p:nvSpPr>
+        <p:spPr>
+          <a:xfrm>
+            <a:off x="1097280" y="4800600"/>
+            <a:ext cx="2953512" cy="1097280"/>
+          </a:xfrm>
+          <a:prstGeom prst="rect">
+            <a:avLst/>
+          </a:prstGeom>
+          <a:noFill/>
+        </p:spPr>
+        <p:txBody>
+          <a:bodyPr wrap="square">
+            <a:spAutoFit/>
+          </a:bodyPr>
+          <a:lstStyle/>
+          <a:p>
+            <a:pPr algn="l">
+              <a:spcAft>
+                <a:spcPts val="400"/>
+              </a:spcAft>
+            </a:pPr>
+            <a:r>
+              <a:rPr sz="1400" b="1" i="0">
+                <a:solidFill>
+                  <a:srgbClr val="84CC16"/>
+                </a:solidFill>
+                <a:latin typeface="Calibri"/>
+              </a:rPr>
+              <a:t>Expansion par sièges</a:t>
+            </a:r>
+          </a:p>
+          <a:p>
+            <a:pPr algn="l">
+              <a:spcAft>
+                <a:spcPts val="600"/>
+              </a:spcAft>
+            </a:pPr>
+            <a:r>
+              <a:rPr sz="1200" b="0" i="0">
+                <a:solidFill>
+                  <a:srgbClr val="C7D2DD"/>
+                </a:solidFill>
+                <a:latin typeface="Calibri"/>
+              </a:rPr>
+              <a:t>le revenu par compte augmente à chaque consultant ajouté.</a:t>
+            </a:r>
+          </a:p>
+        </p:txBody>
+      </p:sp>
+      <p:sp>
+        <p:nvSpPr>
+          <p:cNvPr id="19" name="Rounded Rectangle 18"/>
+          <p:cNvSpPr/>
+          <p:nvPr/>
+        </p:nvSpPr>
+        <p:spPr>
+          <a:xfrm>
+            <a:off x="4599432" y="4572000"/>
+            <a:ext cx="3502152" cy="1463040"/>
+          </a:xfrm>
+          <a:prstGeom prst="roundRect">
+            <a:avLst/>
+          </a:prstGeom>
+          <a:solidFill>
+            <a:srgbClr val="0F1720"/>
+          </a:solidFill>
+          <a:ln w="12700">
+            <a:solidFill>
+              <a:srgbClr val="2A3B4C"/>
+            </a:solidFill>
+          </a:ln>
+          <a:effectLst/>
+        </p:spPr>
+        <p:style>
+          <a:lnRef idx="1">
+            <a:schemeClr val="accent1"/>
+          </a:lnRef>
+          <a:fillRef idx="3">
+            <a:schemeClr val="accent1"/>
+          </a:fillRef>
+          <a:effectRef idx="2">
+            <a:schemeClr val="accent1"/>
+          </a:effectRef>
+          <a:fontRef idx="minor">
+            <a:schemeClr val="lt1"/>
+          </a:fontRef>
+        </p:style>
+        <p:txBody>
+          <a:bodyPr rtlCol="0" anchor="ctr"/>
+          <a:lstStyle/>
+          <a:p>
+            <a:pPr algn="ctr"/>
+          </a:p>
+        </p:txBody>
+      </p:sp>
+      <p:sp>
+        <p:nvSpPr>
+          <p:cNvPr id="20" name="TextBox 19"/>
+          <p:cNvSpPr txBox="1"/>
+          <p:nvPr/>
+        </p:nvSpPr>
+        <p:spPr>
+          <a:xfrm>
+            <a:off x="4873752" y="4800600"/>
+            <a:ext cx="2953512" cy="1097280"/>
+          </a:xfrm>
+          <a:prstGeom prst="rect">
+            <a:avLst/>
+          </a:prstGeom>
+          <a:noFill/>
+        </p:spPr>
+        <p:txBody>
+          <a:bodyPr wrap="square">
+            <a:spAutoFit/>
+          </a:bodyPr>
+          <a:lstStyle/>
+          <a:p>
+            <a:pPr algn="l">
+              <a:spcAft>
+                <a:spcPts val="400"/>
+              </a:spcAft>
+            </a:pPr>
+            <a:r>
+              <a:rPr sz="1400" b="1" i="0">
+                <a:solidFill>
+                  <a:srgbClr val="84CC16"/>
+                </a:solidFill>
+                <a:latin typeface="Calibri"/>
+              </a:rPr>
+              <a:t>Modules add-on</a:t>
+            </a:r>
+          </a:p>
+          <a:p>
+            <a:pPr algn="l">
+              <a:spcAft>
+                <a:spcPts val="600"/>
+              </a:spcAft>
+            </a:pPr>
+            <a:r>
+              <a:rPr sz="1200" b="0" i="0">
+                <a:solidFill>
+                  <a:srgbClr val="C7D2DD"/>
+                </a:solidFill>
+                <a:latin typeface="Calibri"/>
+              </a:rPr>
+              <a:t>Recrutement et Business Développement : +59 €/mois par entreprise chacun.</a:t>
+            </a:r>
+          </a:p>
+        </p:txBody>
+      </p:sp>
+      <p:sp>
+        <p:nvSpPr>
+          <p:cNvPr id="21" name="Rounded Rectangle 20"/>
+          <p:cNvSpPr/>
+          <p:nvPr/>
+        </p:nvSpPr>
+        <p:spPr>
+          <a:xfrm>
+            <a:off x="8375904" y="4572000"/>
+            <a:ext cx="3502152" cy="1463040"/>
+          </a:xfrm>
+          <a:prstGeom prst="roundRect">
+            <a:avLst/>
+          </a:prstGeom>
+          <a:solidFill>
+            <a:srgbClr val="0F1720"/>
+          </a:solidFill>
+          <a:ln w="12700">
+            <a:solidFill>
+              <a:srgbClr val="2A3B4C"/>
+            </a:solidFill>
+          </a:ln>
+          <a:effectLst/>
+        </p:spPr>
+        <p:style>
+          <a:lnRef idx="1">
+            <a:schemeClr val="accent1"/>
+          </a:lnRef>
+          <a:fillRef idx="3">
+            <a:schemeClr val="accent1"/>
+          </a:fillRef>
+          <a:effectRef idx="2">
+            <a:schemeClr val="accent1"/>
+          </a:effectRef>
+          <a:fontRef idx="minor">
+            <a:schemeClr val="lt1"/>
+          </a:fontRef>
+        </p:style>
+        <p:txBody>
+          <a:bodyPr rtlCol="0" anchor="ctr"/>
+          <a:lstStyle/>
+          <a:p>
+            <a:pPr algn="ctr"/>
+          </a:p>
+        </p:txBody>
+      </p:sp>
+      <p:sp>
+        <p:nvSpPr>
+          <p:cNvPr id="22" name="TextBox 21"/>
+          <p:cNvSpPr txBox="1"/>
+          <p:nvPr/>
+        </p:nvSpPr>
+        <p:spPr>
+          <a:xfrm>
+            <a:off x="8650224" y="4800600"/>
+            <a:ext cx="2953512" cy="1097280"/>
+          </a:xfrm>
+          <a:prstGeom prst="rect">
+            <a:avLst/>
+          </a:prstGeom>
+          <a:noFill/>
+        </p:spPr>
+        <p:txBody>
+          <a:bodyPr wrap="square">
+            <a:spAutoFit/>
+          </a:bodyPr>
+          <a:lstStyle/>
+          <a:p>
+            <a:pPr algn="l">
+              <a:spcAft>
+                <a:spcPts val="400"/>
+              </a:spcAft>
+            </a:pPr>
+            <a:r>
+              <a:rPr sz="1400" b="1" i="0">
+                <a:solidFill>
+                  <a:srgbClr val="84CC16"/>
+                </a:solidFill>
+                <a:latin typeface="Calibri"/>
+              </a:rPr>
+              <a:t>Annuel</a:t>
+            </a:r>
+          </a:p>
+          <a:p>
+            <a:pPr algn="l">
+              <a:spcAft>
+                <a:spcPts val="600"/>
+              </a:spcAft>
+            </a:pPr>
+            <a:r>
+              <a:rPr sz="1200" b="0" i="0">
+                <a:solidFill>
+                  <a:srgbClr val="C7D2DD"/>
+                </a:solidFill>
+                <a:latin typeface="Calibri"/>
+              </a:rPr>
+              <a:t>engagement annuel avec 2 mois offerts → trésorerie et rétention.</a:t>
+            </a:r>
+          </a:p>
+        </p:txBody>
+      </p:sp>
+      <p:sp>
+        <p:nvSpPr>
+          <p:cNvPr id="23" name="TextBox 22"/>
+          <p:cNvSpPr txBox="1"/>
+          <p:nvPr/>
+        </p:nvSpPr>
+        <p:spPr>
+          <a:xfrm>
+            <a:off x="11247120" y="6419088"/>
+            <a:ext cx="822960" cy="365760"/>
+          </a:xfrm>
+          <a:prstGeom prst="rect">
+            <a:avLst/>
+          </a:prstGeom>
+          <a:noFill/>
+        </p:spPr>
+        <p:txBody>
+          <a:bodyPr wrap="square">
+            <a:spAutoFit/>
+          </a:bodyPr>
+          <a:lstStyle/>
+          <a:p>
             <a:pPr algn="r">
               <a:spcAft>
                 <a:spcPts val="600"/>
@@ -8651,7 +9688,7 @@
                 </a:solidFill>
                 <a:latin typeface="Calibri"/>
               </a:rPr>
-              <a:t>6</a:t>
+              <a:t>5</a:t>
             </a:r>
           </a:p>
         </p:txBody>
@@ -8689,7 +9726,7 @@
             <a:avLst/>
           </a:prstGeom>
           <a:solidFill>
-            <a:srgbClr val="1B2B3A"/>
+            <a:srgbClr val="FFFFFF"/>
           </a:solidFill>
           <a:ln>
             <a:noFill/>
@@ -8720,16 +9757,16 @@
       </p:sp>
       <p:sp>
         <p:nvSpPr>
-          <p:cNvPr id="3" name="Rectangle 2"/>
+          <p:cNvPr id="3" name="Rounded Rectangle 2"/>
           <p:cNvSpPr/>
           <p:nvPr/>
         </p:nvSpPr>
         <p:spPr>
           <a:xfrm>
-            <a:off x="0" y="0"/>
-            <a:ext cx="12191695" cy="6858000"/>
-          </a:xfrm>
-          <a:prstGeom prst="rect">
+            <a:off x="822960" y="594360"/>
+            <a:ext cx="2286000" cy="384048"/>
+          </a:xfrm>
+          <a:prstGeom prst="roundRect">
             <a:avLst/>
           </a:prstGeom>
           <a:solidFill>
@@ -8755,32 +9792,86 @@
           </a:fontRef>
         </p:style>
         <p:txBody>
-          <a:bodyPr rtlCol="0" anchor="ctr"/>
-          <a:lstStyle/>
-          <a:p>
-            <a:pPr algn="ctr"/>
-          </a:p>
-        </p:txBody>
-      </p:sp>
-      <p:sp>
-        <p:nvSpPr>
-          <p:cNvPr id="4" name="Rounded Rectangle 3"/>
+          <a:bodyPr rtlCol="0" anchor="ctr" wrap="square"/>
+          <a:lstStyle/>
+          <a:p>
+            <a:pPr algn="ctr">
+              <a:spcAft>
+                <a:spcPts val="600"/>
+              </a:spcAft>
+            </a:pPr>
+            <a:r>
+              <a:rPr sz="1100" b="1" i="0">
+                <a:solidFill>
+                  <a:srgbClr val="FFFFFF"/>
+                </a:solidFill>
+                <a:latin typeface="Calibri"/>
+              </a:rPr>
+              <a:t>GO-TO-MARKET</a:t>
+            </a:r>
+          </a:p>
+        </p:txBody>
+      </p:sp>
+      <p:sp>
+        <p:nvSpPr>
+          <p:cNvPr id="4" name="TextBox 3"/>
+          <p:cNvSpPr txBox="1"/>
+          <p:nvPr/>
+        </p:nvSpPr>
+        <p:spPr>
+          <a:xfrm>
+            <a:off x="822960" y="1005840"/>
+            <a:ext cx="10515600" cy="914400"/>
+          </a:xfrm>
+          <a:prstGeom prst="rect">
+            <a:avLst/>
+          </a:prstGeom>
+          <a:noFill/>
+        </p:spPr>
+        <p:txBody>
+          <a:bodyPr wrap="square">
+            <a:spAutoFit/>
+          </a:bodyPr>
+          <a:lstStyle/>
+          <a:p>
+            <a:pPr algn="l">
+              <a:spcAft>
+                <a:spcPts val="600"/>
+              </a:spcAft>
+            </a:pPr>
+            <a:r>
+              <a:rPr sz="3000" b="1" i="0">
+                <a:solidFill>
+                  <a:srgbClr val="1B2B3A"/>
+                </a:solidFill>
+                <a:latin typeface="Calibri"/>
+              </a:rPr>
+              <a:t>Deux moteurs d'acquisition complémentaires</a:t>
+            </a:r>
+          </a:p>
+        </p:txBody>
+      </p:sp>
+      <p:sp>
+        <p:nvSpPr>
+          <p:cNvPr id="5" name="Rounded Rectangle 4"/>
           <p:cNvSpPr/>
           <p:nvPr/>
         </p:nvSpPr>
         <p:spPr>
           <a:xfrm>
-            <a:off x="822960" y="594360"/>
-            <a:ext cx="1737360" cy="384048"/>
+            <a:off x="822960" y="2194560"/>
+            <a:ext cx="5349240" cy="2377440"/>
           </a:xfrm>
           <a:prstGeom prst="roundRect">
             <a:avLst/>
           </a:prstGeom>
           <a:solidFill>
-            <a:srgbClr val="84CC16"/>
-          </a:solidFill>
-          <a:ln>
-            <a:noFill/>
+            <a:srgbClr val="F7F9FB"/>
+          </a:solidFill>
+          <a:ln w="12700">
+            <a:solidFill>
+              <a:srgbClr val="E2E8F0"/>
+            </a:solidFill>
           </a:ln>
           <a:effectLst/>
         </p:spPr>
@@ -8799,62 +9890,10 @@
           </a:fontRef>
         </p:style>
         <p:txBody>
-          <a:bodyPr rtlCol="0" anchor="ctr" wrap="square"/>
-          <a:lstStyle/>
-          <a:p>
-            <a:pPr algn="ctr">
-              <a:spcAft>
-                <a:spcPts val="600"/>
-              </a:spcAft>
-            </a:pPr>
-            <a:r>
-              <a:rPr sz="1100" b="1" i="0">
-                <a:solidFill>
-                  <a:srgbClr val="1B2B3A"/>
-                </a:solidFill>
-                <a:latin typeface="Calibri"/>
-              </a:rPr>
-              <a:t>STATUT</a:t>
-            </a:r>
-          </a:p>
-        </p:txBody>
-      </p:sp>
-      <p:sp>
-        <p:nvSpPr>
-          <p:cNvPr id="5" name="TextBox 4"/>
-          <p:cNvSpPr txBox="1"/>
-          <p:nvPr/>
-        </p:nvSpPr>
-        <p:spPr>
-          <a:xfrm>
-            <a:off x="822960" y="1005840"/>
-            <a:ext cx="10515600" cy="914400"/>
-          </a:xfrm>
-          <a:prstGeom prst="rect">
-            <a:avLst/>
-          </a:prstGeom>
-          <a:noFill/>
-        </p:spPr>
-        <p:txBody>
-          <a:bodyPr wrap="square">
-            <a:spAutoFit/>
-          </a:bodyPr>
-          <a:lstStyle/>
-          <a:p>
-            <a:pPr algn="l">
-              <a:spcAft>
-                <a:spcPts val="600"/>
-              </a:spcAft>
-            </a:pPr>
-            <a:r>
-              <a:rPr sz="3000" b="1" i="0">
-                <a:solidFill>
-                  <a:srgbClr val="FFFFFF"/>
-                </a:solidFill>
-                <a:latin typeface="Calibri"/>
-              </a:rPr>
-              <a:t>Produit en production, premiers clients</a:t>
-            </a:r>
+          <a:bodyPr rtlCol="0" anchor="ctr"/>
+          <a:lstStyle/>
+          <a:p>
+            <a:pPr algn="ctr"/>
           </a:p>
         </p:txBody>
       </p:sp>
@@ -8866,14 +9905,14 @@
         </p:nvSpPr>
         <p:spPr>
           <a:xfrm>
-            <a:off x="822960" y="2194560"/>
-            <a:ext cx="2514600" cy="1828800"/>
+            <a:off x="1188720" y="2514600"/>
+            <a:ext cx="2194560" cy="384048"/>
           </a:xfrm>
           <a:prstGeom prst="roundRect">
             <a:avLst/>
           </a:prstGeom>
           <a:solidFill>
-            <a:srgbClr val="0F1720"/>
+            <a:srgbClr val="1B2B3A"/>
           </a:solidFill>
           <a:ln>
             <a:noFill/>
@@ -8895,10 +9934,23 @@
           </a:fontRef>
         </p:style>
         <p:txBody>
-          <a:bodyPr rtlCol="0" anchor="ctr"/>
-          <a:lstStyle/>
-          <a:p>
-            <a:pPr algn="ctr"/>
+          <a:bodyPr rtlCol="0" anchor="ctr" wrap="square"/>
+          <a:lstStyle/>
+          <a:p>
+            <a:pPr algn="ctr">
+              <a:spcAft>
+                <a:spcPts val="600"/>
+              </a:spcAft>
+            </a:pPr>
+            <a:r>
+              <a:rPr sz="1100" b="1" i="0">
+                <a:solidFill>
+                  <a:srgbClr val="FFFFFF"/>
+                </a:solidFill>
+                <a:latin typeface="Calibri"/>
+              </a:rPr>
+              <a:t>SELF-SERVICE</a:t>
+            </a:r>
           </a:p>
         </p:txBody>
       </p:sp>
@@ -8910,8 +9962,8 @@
         </p:nvSpPr>
         <p:spPr>
           <a:xfrm>
-            <a:off x="1051560" y="2468879"/>
-            <a:ext cx="2057400" cy="1371600"/>
+            <a:off x="1188720" y="3108960"/>
+            <a:ext cx="4617720" cy="1280160"/>
           </a:xfrm>
           <a:prstGeom prst="rect">
             <a:avLst/>
@@ -8924,35 +9976,35 @@
           </a:bodyPr>
           <a:lstStyle/>
           <a:p>
-            <a:pPr algn="ctr">
+            <a:pPr algn="l">
+              <a:spcAft>
+                <a:spcPts val="800"/>
+              </a:spcAft>
+            </a:pPr>
+            <a:r>
+              <a:rPr sz="1900" b="1" i="0">
+                <a:solidFill>
+                  <a:srgbClr val="1B2B3A"/>
+                </a:solidFill>
+                <a:latin typeface="Calibri"/>
+              </a:rPr>
+              <a:t>Libre-service</a:t>
+            </a:r>
+          </a:p>
+          <a:p>
+            <a:pPr algn="l">
               <a:spcAft>
                 <a:spcPts val="600"/>
               </a:spcAft>
             </a:pPr>
             <a:r>
-              <a:rPr sz="2000" b="1" i="0">
-                <a:solidFill>
-                  <a:srgbClr val="84CC16"/>
-                </a:solidFill>
-                <a:latin typeface="Calibri"/>
-              </a:rPr>
-              <a:t>Live</a:t>
-            </a:r>
-          </a:p>
-          <a:p>
-            <a:pPr algn="ctr">
-              <a:spcAft>
-                <a:spcPts val="600"/>
-              </a:spcAft>
-            </a:pPr>
-            <a:r>
-              <a:rPr sz="1200" b="0" i="0">
-                <a:solidFill>
-                  <a:srgbClr val="C7D2DD"/>
-                </a:solidFill>
-                <a:latin typeface="Calibri"/>
-              </a:rPr>
-              <a:t>Produit déployé en production (konsilys.fr)</a:t>
+              <a:rPr sz="1350" b="0" i="0">
+                <a:solidFill>
+                  <a:srgbClr val="647485"/>
+                </a:solidFill>
+                <a:latin typeface="Calibri"/>
+              </a:rPr>
+              <a:t>Tarifs publics et souscription en ligne : l'ESN crée son espace, importe son équipe et paie en autonomie. Coût d'acquisition faible, cycle court.</a:t>
             </a:r>
           </a:p>
         </p:txBody>
@@ -8965,17 +10017,19 @@
         </p:nvSpPr>
         <p:spPr>
           <a:xfrm>
-            <a:off x="3593592" y="2194560"/>
-            <a:ext cx="2514600" cy="1828800"/>
+            <a:off x="6492240" y="2194560"/>
+            <a:ext cx="5349240" cy="2377440"/>
           </a:xfrm>
           <a:prstGeom prst="roundRect">
             <a:avLst/>
           </a:prstGeom>
           <a:solidFill>
-            <a:srgbClr val="0F1720"/>
-          </a:solidFill>
-          <a:ln>
-            <a:noFill/>
+            <a:srgbClr val="F7F9FB"/>
+          </a:solidFill>
+          <a:ln w="12700">
+            <a:solidFill>
+              <a:srgbClr val="E2E8F0"/>
+            </a:solidFill>
           </a:ln>
           <a:effectLst/>
         </p:spPr>
@@ -9003,75 +10057,20 @@
       </p:sp>
       <p:sp>
         <p:nvSpPr>
-          <p:cNvPr id="9" name="TextBox 8"/>
-          <p:cNvSpPr txBox="1"/>
-          <p:nvPr/>
-        </p:nvSpPr>
-        <p:spPr>
-          <a:xfrm>
-            <a:off x="3822191" y="2468879"/>
-            <a:ext cx="2057400" cy="1371600"/>
-          </a:xfrm>
-          <a:prstGeom prst="rect">
-            <a:avLst/>
-          </a:prstGeom>
-          <a:noFill/>
-        </p:spPr>
-        <p:txBody>
-          <a:bodyPr wrap="square">
-            <a:spAutoFit/>
-          </a:bodyPr>
-          <a:lstStyle/>
-          <a:p>
-            <a:pPr algn="ctr">
-              <a:spcAft>
-                <a:spcPts val="600"/>
-              </a:spcAft>
-            </a:pPr>
-            <a:r>
-              <a:rPr sz="2000" b="1" i="0">
-                <a:solidFill>
-                  <a:srgbClr val="84CC16"/>
-                </a:solidFill>
-                <a:latin typeface="Calibri"/>
-              </a:rPr>
-              <a:t>Multi-tenant</a:t>
-            </a:r>
-          </a:p>
-          <a:p>
-            <a:pPr algn="ctr">
-              <a:spcAft>
-                <a:spcPts val="600"/>
-              </a:spcAft>
-            </a:pPr>
-            <a:r>
-              <a:rPr sz="1200" b="0" i="0">
-                <a:solidFill>
-                  <a:srgbClr val="C7D2DD"/>
-                </a:solidFill>
-                <a:latin typeface="Calibri"/>
-              </a:rPr>
-              <a:t>Plusieurs entreprises actives sur la plateforme</a:t>
-            </a:r>
-          </a:p>
-        </p:txBody>
-      </p:sp>
-      <p:sp>
-        <p:nvSpPr>
-          <p:cNvPr id="10" name="Rounded Rectangle 9"/>
+          <p:cNvPr id="9" name="Rounded Rectangle 8"/>
           <p:cNvSpPr/>
           <p:nvPr/>
         </p:nvSpPr>
         <p:spPr>
           <a:xfrm>
-            <a:off x="6364224" y="2194560"/>
-            <a:ext cx="2514600" cy="1828800"/>
+            <a:off x="6858000" y="2514600"/>
+            <a:ext cx="2194560" cy="384048"/>
           </a:xfrm>
           <a:prstGeom prst="roundRect">
             <a:avLst/>
           </a:prstGeom>
           <a:solidFill>
-            <a:srgbClr val="0F1720"/>
+            <a:srgbClr val="1B2B3A"/>
           </a:solidFill>
           <a:ln>
             <a:noFill/>
@@ -9093,23 +10092,36 @@
           </a:fontRef>
         </p:style>
         <p:txBody>
-          <a:bodyPr rtlCol="0" anchor="ctr"/>
-          <a:lstStyle/>
-          <a:p>
-            <a:pPr algn="ctr"/>
-          </a:p>
-        </p:txBody>
-      </p:sp>
-      <p:sp>
-        <p:nvSpPr>
-          <p:cNvPr id="11" name="TextBox 10"/>
+          <a:bodyPr rtlCol="0" anchor="ctr" wrap="square"/>
+          <a:lstStyle/>
+          <a:p>
+            <a:pPr algn="ctr">
+              <a:spcAft>
+                <a:spcPts val="600"/>
+              </a:spcAft>
+            </a:pPr>
+            <a:r>
+              <a:rPr sz="1100" b="1" i="0">
+                <a:solidFill>
+                  <a:srgbClr val="FFFFFF"/>
+                </a:solidFill>
+                <a:latin typeface="Calibri"/>
+              </a:rPr>
+              <a:t>SALES-LED</a:t>
+            </a:r>
+          </a:p>
+        </p:txBody>
+      </p:sp>
+      <p:sp>
+        <p:nvSpPr>
+          <p:cNvPr id="10" name="TextBox 9"/>
           <p:cNvSpPr txBox="1"/>
           <p:nvPr/>
         </p:nvSpPr>
         <p:spPr>
           <a:xfrm>
-            <a:off x="6592824" y="2468879"/>
-            <a:ext cx="2057400" cy="1371600"/>
+            <a:off x="6858000" y="3108960"/>
+            <a:ext cx="4617720" cy="1280160"/>
           </a:xfrm>
           <a:prstGeom prst="rect">
             <a:avLst/>
@@ -9122,93 +10134,49 @@
           </a:bodyPr>
           <a:lstStyle/>
           <a:p>
-            <a:pPr algn="ctr">
+            <a:pPr algn="l">
+              <a:spcAft>
+                <a:spcPts val="800"/>
+              </a:spcAft>
+            </a:pPr>
+            <a:r>
+              <a:rPr sz="1900" b="1" i="0">
+                <a:solidFill>
+                  <a:srgbClr val="1B2B3A"/>
+                </a:solidFill>
+                <a:latin typeface="Calibri"/>
+              </a:rPr>
+              <a:t>Vente consultative</a:t>
+            </a:r>
+          </a:p>
+          <a:p>
+            <a:pPr algn="l">
               <a:spcAft>
                 <a:spcPts val="600"/>
               </a:spcAft>
             </a:pPr>
             <a:r>
-              <a:rPr sz="2000" b="1" i="0">
-                <a:solidFill>
-                  <a:srgbClr val="84CC16"/>
-                </a:solidFill>
-                <a:latin typeface="Calibri"/>
-              </a:rPr>
-              <a:t>Paiement</a:t>
-            </a:r>
-          </a:p>
-          <a:p>
-            <a:pPr algn="ctr">
-              <a:spcAft>
-                <a:spcPts val="600"/>
-              </a:spcAft>
-            </a:pPr>
-            <a:r>
-              <a:rPr sz="1200" b="0" i="0">
-                <a:solidFill>
-                  <a:srgbClr val="C7D2DD"/>
-                </a:solidFill>
-                <a:latin typeface="Calibri"/>
-              </a:rPr>
-              <a:t>Souscription Stripe opérationnelle de bout en bout</a:t>
-            </a:r>
-          </a:p>
-        </p:txBody>
-      </p:sp>
-      <p:sp>
-        <p:nvSpPr>
-          <p:cNvPr id="12" name="Rounded Rectangle 11"/>
-          <p:cNvSpPr/>
-          <p:nvPr/>
-        </p:nvSpPr>
-        <p:spPr>
-          <a:xfrm>
-            <a:off x="9134856" y="2194560"/>
-            <a:ext cx="2514600" cy="1828800"/>
-          </a:xfrm>
-          <a:prstGeom prst="roundRect">
-            <a:avLst/>
-          </a:prstGeom>
-          <a:solidFill>
-            <a:srgbClr val="0F1720"/>
-          </a:solidFill>
-          <a:ln>
-            <a:noFill/>
-          </a:ln>
-          <a:effectLst/>
-        </p:spPr>
-        <p:style>
-          <a:lnRef idx="1">
-            <a:schemeClr val="accent1"/>
-          </a:lnRef>
-          <a:fillRef idx="3">
-            <a:schemeClr val="accent1"/>
-          </a:fillRef>
-          <a:effectRef idx="2">
-            <a:schemeClr val="accent1"/>
-          </a:effectRef>
-          <a:fontRef idx="minor">
-            <a:schemeClr val="lt1"/>
-          </a:fontRef>
-        </p:style>
-        <p:txBody>
-          <a:bodyPr rtlCol="0" anchor="ctr"/>
-          <a:lstStyle/>
-          <a:p>
-            <a:pPr algn="ctr"/>
-          </a:p>
-        </p:txBody>
-      </p:sp>
-      <p:sp>
-        <p:nvSpPr>
-          <p:cNvPr id="13" name="TextBox 12"/>
+              <a:rPr sz="1350" b="0" i="0">
+                <a:solidFill>
+                  <a:srgbClr val="647485"/>
+                </a:solidFill>
+                <a:latin typeface="Calibri"/>
+              </a:rPr>
+              <a:t>Pour les organisations plus grandes : démonstration avec leurs données, accompagnement à la migration et à l'onboarding.</a:t>
+            </a:r>
+          </a:p>
+        </p:txBody>
+      </p:sp>
+      <p:sp>
+        <p:nvSpPr>
+          <p:cNvPr id="11" name="TextBox 10"/>
           <p:cNvSpPr txBox="1"/>
           <p:nvPr/>
         </p:nvSpPr>
         <p:spPr>
           <a:xfrm>
-            <a:off x="9363456" y="2468879"/>
-            <a:ext cx="2057400" cy="1371600"/>
+            <a:off x="822960" y="4800600"/>
+            <a:ext cx="10515600" cy="914400"/>
           </a:xfrm>
           <a:prstGeom prst="rect">
             <a:avLst/>
@@ -9221,48 +10189,32 @@
           </a:bodyPr>
           <a:lstStyle/>
           <a:p>
-            <a:pPr algn="ctr">
+            <a:pPr algn="l">
               <a:spcAft>
                 <a:spcPts val="600"/>
               </a:spcAft>
             </a:pPr>
             <a:r>
-              <a:rPr sz="2000" b="1" i="0">
-                <a:solidFill>
-                  <a:srgbClr val="84CC16"/>
-                </a:solidFill>
-                <a:latin typeface="Calibri"/>
-              </a:rPr>
-              <a:t>Modules</a:t>
-            </a:r>
-          </a:p>
-          <a:p>
-            <a:pPr algn="ctr">
-              <a:spcAft>
-                <a:spcPts val="600"/>
-              </a:spcAft>
-            </a:pPr>
-            <a:r>
-              <a:rPr sz="1200" b="0" i="0">
-                <a:solidFill>
-                  <a:srgbClr val="C7D2DD"/>
-                </a:solidFill>
-                <a:latin typeface="Calibri"/>
-              </a:rPr>
-              <a:t>Recrutement &amp; CRM commercial livrés</a:t>
-            </a:r>
-          </a:p>
-        </p:txBody>
-      </p:sp>
-      <p:sp>
-        <p:nvSpPr>
-          <p:cNvPr id="14" name="Rounded Rectangle 13"/>
+              <a:rPr sz="1350" b="0" i="1">
+                <a:solidFill>
+                  <a:srgbClr val="647485"/>
+                </a:solidFill>
+                <a:latin typeface="Calibri"/>
+              </a:rPr>
+              <a:t>Leviers : référencement du site vitrine, démonstration en un clic, et effet de recommandation intra-secteur (les dirigeants d'ESN se connaissent).</a:t>
+            </a:r>
+          </a:p>
+        </p:txBody>
+      </p:sp>
+      <p:sp>
+        <p:nvSpPr>
+          <p:cNvPr id="12" name="Rounded Rectangle 11"/>
           <p:cNvSpPr/>
           <p:nvPr/>
         </p:nvSpPr>
         <p:spPr>
           <a:xfrm>
-            <a:off x="822960" y="4663440"/>
+            <a:off x="822960" y="5852160"/>
             <a:ext cx="10543032" cy="457200"/>
           </a:xfrm>
           <a:prstGeom prst="roundRect">
@@ -9308,21 +10260,21 @@
                 </a:solidFill>
                 <a:latin typeface="Calibri"/>
               </a:rPr>
-              <a:t>À COMPLÉTER — chiffrer la traction : nb d'ESN clientes, consultants gérés, MRR, croissance MoM, rétention</a:t>
-            </a:r>
-          </a:p>
-        </p:txBody>
-      </p:sp>
-      <p:sp>
-        <p:nvSpPr>
-          <p:cNvPr id="15" name="TextBox 14"/>
+              <a:t>À COMPLÉTER — ajouter vos canaux réels (LinkedIn, partenariats, salons) et le CAC/LTV visés</a:t>
+            </a:r>
+          </a:p>
+        </p:txBody>
+      </p:sp>
+      <p:sp>
+        <p:nvSpPr>
+          <p:cNvPr id="13" name="TextBox 12"/>
           <p:cNvSpPr txBox="1"/>
           <p:nvPr/>
         </p:nvSpPr>
         <p:spPr>
           <a:xfrm>
-            <a:off x="822960" y="5394960"/>
-            <a:ext cx="10515600" cy="822960"/>
+            <a:off x="11247120" y="6419088"/>
+            <a:ext cx="822960" cy="365760"/>
           </a:xfrm>
           <a:prstGeom prst="rect">
             <a:avLst/>
@@ -9335,58 +10287,19 @@
           </a:bodyPr>
           <a:lstStyle/>
           <a:p>
-            <a:pPr algn="l">
+            <a:pPr algn="r">
               <a:spcAft>
                 <a:spcPts val="600"/>
               </a:spcAft>
             </a:pPr>
             <a:r>
-              <a:rPr sz="1400" b="0" i="1">
-                <a:solidFill>
-                  <a:srgbClr val="C7D2DD"/>
-                </a:solidFill>
-                <a:latin typeface="Calibri"/>
-              </a:rPr>
-              <a:t>Le produit est complet et vendable dès aujourd'hui : l'enjeu est désormais l'accélération commerciale.</a:t>
-            </a:r>
-          </a:p>
-        </p:txBody>
-      </p:sp>
-      <p:sp>
-        <p:nvSpPr>
-          <p:cNvPr id="16" name="TextBox 15"/>
-          <p:cNvSpPr txBox="1"/>
-          <p:nvPr/>
-        </p:nvSpPr>
-        <p:spPr>
-          <a:xfrm>
-            <a:off x="11247120" y="6419088"/>
-            <a:ext cx="822960" cy="365760"/>
-          </a:xfrm>
-          <a:prstGeom prst="rect">
-            <a:avLst/>
-          </a:prstGeom>
-          <a:noFill/>
-        </p:spPr>
-        <p:txBody>
-          <a:bodyPr wrap="square">
-            <a:spAutoFit/>
-          </a:bodyPr>
-          <a:lstStyle/>
-          <a:p>
-            <a:pPr algn="r">
-              <a:spcAft>
-                <a:spcPts val="600"/>
-              </a:spcAft>
-            </a:pPr>
-            <a:r>
               <a:rPr sz="1000" b="0" i="0">
                 <a:solidFill>
                   <a:srgbClr val="647485"/>
                 </a:solidFill>
                 <a:latin typeface="Calibri"/>
               </a:rPr>
-              <a:t>7</a:t>
+              <a:t>6</a:t>
             </a:r>
           </a:p>
         </p:txBody>
@@ -9424,7 +10337,7 @@
             <a:avLst/>
           </a:prstGeom>
           <a:solidFill>
-            <a:srgbClr val="FFFFFF"/>
+            <a:srgbClr val="1B2B3A"/>
           </a:solidFill>
           <a:ln>
             <a:noFill/>
@@ -9455,16 +10368,16 @@
       </p:sp>
       <p:sp>
         <p:nvSpPr>
-          <p:cNvPr id="3" name="Rounded Rectangle 2"/>
+          <p:cNvPr id="3" name="Rectangle 2"/>
           <p:cNvSpPr/>
           <p:nvPr/>
         </p:nvSpPr>
         <p:spPr>
           <a:xfrm>
-            <a:off x="822960" y="594360"/>
-            <a:ext cx="2286000" cy="384048"/>
-          </a:xfrm>
-          <a:prstGeom prst="roundRect">
+            <a:off x="0" y="0"/>
+            <a:ext cx="12191695" cy="6858000"/>
+          </a:xfrm>
+          <a:prstGeom prst="rect">
             <a:avLst/>
           </a:prstGeom>
           <a:solidFill>
@@ -9490,77 +10403,25 @@
           </a:fontRef>
         </p:style>
         <p:txBody>
-          <a:bodyPr rtlCol="0" anchor="ctr" wrap="square"/>
-          <a:lstStyle/>
-          <a:p>
-            <a:pPr algn="ctr">
-              <a:spcAft>
-                <a:spcPts val="600"/>
-              </a:spcAft>
-            </a:pPr>
-            <a:r>
-              <a:rPr sz="1100" b="1" i="0">
-                <a:solidFill>
-                  <a:srgbClr val="FFFFFF"/>
-                </a:solidFill>
-                <a:latin typeface="Calibri"/>
-              </a:rPr>
-              <a:t>ROADMAP</a:t>
-            </a:r>
-          </a:p>
-        </p:txBody>
-      </p:sp>
-      <p:sp>
-        <p:nvSpPr>
-          <p:cNvPr id="4" name="TextBox 3"/>
-          <p:cNvSpPr txBox="1"/>
-          <p:nvPr/>
-        </p:nvSpPr>
-        <p:spPr>
-          <a:xfrm>
-            <a:off x="822960" y="1005840"/>
-            <a:ext cx="10515600" cy="914400"/>
-          </a:xfrm>
-          <a:prstGeom prst="rect">
-            <a:avLst/>
-          </a:prstGeom>
-          <a:noFill/>
-        </p:spPr>
-        <p:txBody>
-          <a:bodyPr wrap="square">
-            <a:spAutoFit/>
-          </a:bodyPr>
-          <a:lstStyle/>
-          <a:p>
-            <a:pPr algn="l">
-              <a:spcAft>
-                <a:spcPts val="600"/>
-              </a:spcAft>
-            </a:pPr>
-            <a:r>
-              <a:rPr sz="3000" b="1" i="0">
-                <a:solidFill>
-                  <a:srgbClr val="1B2B3A"/>
-                </a:solidFill>
-                <a:latin typeface="Calibri"/>
-              </a:rPr>
-              <a:t>Ce qui vient ensuite</a:t>
-            </a:r>
-          </a:p>
-        </p:txBody>
-      </p:sp>
-      <p:sp>
-        <p:nvSpPr>
-          <p:cNvPr id="5" name="Oval 4"/>
+          <a:bodyPr rtlCol="0" anchor="ctr"/>
+          <a:lstStyle/>
+          <a:p>
+            <a:pPr algn="ctr"/>
+          </a:p>
+        </p:txBody>
+      </p:sp>
+      <p:sp>
+        <p:nvSpPr>
+          <p:cNvPr id="4" name="Rounded Rectangle 3"/>
           <p:cNvSpPr/>
           <p:nvPr/>
         </p:nvSpPr>
         <p:spPr>
           <a:xfrm>
-            <a:off x="868680" y="2194560"/>
-            <a:ext cx="502920" cy="502920"/>
-          </a:xfrm>
-          <a:prstGeom prst="ellipse">
+            <a:off x="822960" y="594360"/>
+            <a:ext cx="1737360" cy="384048"/>
+          </a:xfrm>
+          <a:prstGeom prst="roundRect">
             <a:avLst/>
           </a:prstGeom>
           <a:solidFill>
@@ -9586,7 +10447,7 @@
           </a:fontRef>
         </p:style>
         <p:txBody>
-          <a:bodyPr rtlCol="0" anchor="ctr"/>
+          <a:bodyPr rtlCol="0" anchor="ctr" wrap="square"/>
           <a:lstStyle/>
           <a:p>
             <a:pPr algn="ctr">
@@ -9595,13 +10456,52 @@
               </a:spcAft>
             </a:pPr>
             <a:r>
-              <a:rPr sz="1800" b="1" i="0">
+              <a:rPr sz="1100" b="1" i="0">
                 <a:solidFill>
                   <a:srgbClr val="1B2B3A"/>
                 </a:solidFill>
                 <a:latin typeface="Calibri"/>
               </a:rPr>
-              <a:t>1</a:t>
+              <a:t>STATUT</a:t>
+            </a:r>
+          </a:p>
+        </p:txBody>
+      </p:sp>
+      <p:sp>
+        <p:nvSpPr>
+          <p:cNvPr id="5" name="TextBox 4"/>
+          <p:cNvSpPr txBox="1"/>
+          <p:nvPr/>
+        </p:nvSpPr>
+        <p:spPr>
+          <a:xfrm>
+            <a:off x="822960" y="1005840"/>
+            <a:ext cx="10515600" cy="914400"/>
+          </a:xfrm>
+          <a:prstGeom prst="rect">
+            <a:avLst/>
+          </a:prstGeom>
+          <a:noFill/>
+        </p:spPr>
+        <p:txBody>
+          <a:bodyPr wrap="square">
+            <a:spAutoFit/>
+          </a:bodyPr>
+          <a:lstStyle/>
+          <a:p>
+            <a:pPr algn="l">
+              <a:spcAft>
+                <a:spcPts val="600"/>
+              </a:spcAft>
+            </a:pPr>
+            <a:r>
+              <a:rPr sz="3000" b="1" i="0">
+                <a:solidFill>
+                  <a:srgbClr val="FFFFFF"/>
+                </a:solidFill>
+                <a:latin typeface="Calibri"/>
+              </a:rPr>
+              <a:t>Produit en production, premiers clients</a:t>
             </a:r>
           </a:p>
         </p:txBody>
@@ -9614,19 +10514,17 @@
         </p:nvSpPr>
         <p:spPr>
           <a:xfrm>
-            <a:off x="1600200" y="2103120"/>
-            <a:ext cx="9784080" cy="1051560"/>
+            <a:off x="822960" y="2194560"/>
+            <a:ext cx="2514600" cy="1828800"/>
           </a:xfrm>
           <a:prstGeom prst="roundRect">
             <a:avLst/>
           </a:prstGeom>
           <a:solidFill>
-            <a:srgbClr val="F7F9FB"/>
-          </a:solidFill>
-          <a:ln w="12700">
-            <a:solidFill>
-              <a:srgbClr val="E2E8F0"/>
-            </a:solidFill>
+            <a:srgbClr val="0F1720"/>
+          </a:solidFill>
+          <a:ln>
+            <a:noFill/>
           </a:ln>
           <a:effectLst/>
         </p:spPr>
@@ -9660,8 +10558,8 @@
         </p:nvSpPr>
         <p:spPr>
           <a:xfrm>
-            <a:off x="1874519" y="2212848"/>
-            <a:ext cx="9235440" cy="868680"/>
+            <a:off x="1051560" y="2468879"/>
+            <a:ext cx="2057400" cy="1371600"/>
           </a:xfrm>
           <a:prstGeom prst="rect">
             <a:avLst/>
@@ -9674,55 +10572,55 @@
           </a:bodyPr>
           <a:lstStyle/>
           <a:p>
-            <a:pPr algn="l">
-              <a:spcAft>
-                <a:spcPts val="300"/>
-              </a:spcAft>
-            </a:pPr>
-            <a:r>
-              <a:rPr sz="1600" b="1" i="0">
-                <a:solidFill>
-                  <a:srgbClr val="1B2B3A"/>
-                </a:solidFill>
-                <a:latin typeface="Calibri"/>
-              </a:rPr>
-              <a:t>Court terme</a:t>
-            </a:r>
-          </a:p>
-          <a:p>
-            <a:pPr algn="l">
+            <a:pPr algn="ctr">
               <a:spcAft>
                 <a:spcPts val="600"/>
               </a:spcAft>
             </a:pPr>
             <a:r>
-              <a:rPr sz="1300" b="0" i="0">
-                <a:solidFill>
-                  <a:srgbClr val="647485"/>
-                </a:solidFill>
-                <a:latin typeface="Calibri"/>
-              </a:rPr>
-              <a:t>Facturation &amp; exports comptables, notifications avancées, tableau de bord dirigeant enrichi.</a:t>
-            </a:r>
-          </a:p>
-        </p:txBody>
-      </p:sp>
-      <p:sp>
-        <p:nvSpPr>
-          <p:cNvPr id="8" name="Oval 7"/>
+              <a:rPr sz="2000" b="1" i="0">
+                <a:solidFill>
+                  <a:srgbClr val="84CC16"/>
+                </a:solidFill>
+                <a:latin typeface="Calibri"/>
+              </a:rPr>
+              <a:t>Live</a:t>
+            </a:r>
+          </a:p>
+          <a:p>
+            <a:pPr algn="ctr">
+              <a:spcAft>
+                <a:spcPts val="600"/>
+              </a:spcAft>
+            </a:pPr>
+            <a:r>
+              <a:rPr sz="1200" b="0" i="0">
+                <a:solidFill>
+                  <a:srgbClr val="C7D2DD"/>
+                </a:solidFill>
+                <a:latin typeface="Calibri"/>
+              </a:rPr>
+              <a:t>Produit déployé en production (konsilys.fr)</a:t>
+            </a:r>
+          </a:p>
+        </p:txBody>
+      </p:sp>
+      <p:sp>
+        <p:nvSpPr>
+          <p:cNvPr id="8" name="Rounded Rectangle 7"/>
           <p:cNvSpPr/>
           <p:nvPr/>
         </p:nvSpPr>
         <p:spPr>
           <a:xfrm>
-            <a:off x="868680" y="3429000"/>
-            <a:ext cx="502920" cy="502920"/>
-          </a:xfrm>
-          <a:prstGeom prst="ellipse">
-            <a:avLst/>
-          </a:prstGeom>
-          <a:solidFill>
-            <a:srgbClr val="84CC16"/>
+            <a:off x="3593592" y="2194560"/>
+            <a:ext cx="2514600" cy="1828800"/>
+          </a:xfrm>
+          <a:prstGeom prst="roundRect">
+            <a:avLst/>
+          </a:prstGeom>
+          <a:solidFill>
+            <a:srgbClr val="0F1720"/>
           </a:solidFill>
           <a:ln>
             <a:noFill/>
@@ -9747,44 +10645,84 @@
           <a:bodyPr rtlCol="0" anchor="ctr"/>
           <a:lstStyle/>
           <a:p>
+            <a:pPr algn="ctr"/>
+          </a:p>
+        </p:txBody>
+      </p:sp>
+      <p:sp>
+        <p:nvSpPr>
+          <p:cNvPr id="9" name="TextBox 8"/>
+          <p:cNvSpPr txBox="1"/>
+          <p:nvPr/>
+        </p:nvSpPr>
+        <p:spPr>
+          <a:xfrm>
+            <a:off x="3822191" y="2468879"/>
+            <a:ext cx="2057400" cy="1371600"/>
+          </a:xfrm>
+          <a:prstGeom prst="rect">
+            <a:avLst/>
+          </a:prstGeom>
+          <a:noFill/>
+        </p:spPr>
+        <p:txBody>
+          <a:bodyPr wrap="square">
+            <a:spAutoFit/>
+          </a:bodyPr>
+          <a:lstStyle/>
+          <a:p>
             <a:pPr algn="ctr">
               <a:spcAft>
                 <a:spcPts val="600"/>
               </a:spcAft>
             </a:pPr>
             <a:r>
-              <a:rPr sz="1800" b="1" i="0">
-                <a:solidFill>
-                  <a:srgbClr val="1B2B3A"/>
-                </a:solidFill>
-                <a:latin typeface="Calibri"/>
-              </a:rPr>
-              <a:t>2</a:t>
-            </a:r>
-          </a:p>
-        </p:txBody>
-      </p:sp>
-      <p:sp>
-        <p:nvSpPr>
-          <p:cNvPr id="9" name="Rounded Rectangle 8"/>
+              <a:rPr sz="2000" b="1" i="0">
+                <a:solidFill>
+                  <a:srgbClr val="84CC16"/>
+                </a:solidFill>
+                <a:latin typeface="Calibri"/>
+              </a:rPr>
+              <a:t>Multi-tenant</a:t>
+            </a:r>
+          </a:p>
+          <a:p>
+            <a:pPr algn="ctr">
+              <a:spcAft>
+                <a:spcPts val="600"/>
+              </a:spcAft>
+            </a:pPr>
+            <a:r>
+              <a:rPr sz="1200" b="0" i="0">
+                <a:solidFill>
+                  <a:srgbClr val="C7D2DD"/>
+                </a:solidFill>
+                <a:latin typeface="Calibri"/>
+              </a:rPr>
+              <a:t>Plusieurs entreprises actives sur la plateforme</a:t>
+            </a:r>
+          </a:p>
+        </p:txBody>
+      </p:sp>
+      <p:sp>
+        <p:nvSpPr>
+          <p:cNvPr id="10" name="Rounded Rectangle 9"/>
           <p:cNvSpPr/>
           <p:nvPr/>
         </p:nvSpPr>
         <p:spPr>
           <a:xfrm>
-            <a:off x="1600200" y="3337560"/>
-            <a:ext cx="9784080" cy="1051560"/>
+            <a:off x="6364224" y="2194560"/>
+            <a:ext cx="2514600" cy="1828800"/>
           </a:xfrm>
           <a:prstGeom prst="roundRect">
             <a:avLst/>
           </a:prstGeom>
           <a:solidFill>
-            <a:srgbClr val="F7F9FB"/>
-          </a:solidFill>
-          <a:ln w="12700">
-            <a:solidFill>
-              <a:srgbClr val="E2E8F0"/>
-            </a:solidFill>
+            <a:srgbClr val="0F1720"/>
+          </a:solidFill>
+          <a:ln>
+            <a:noFill/>
           </a:ln>
           <a:effectLst/>
         </p:spPr>
@@ -9812,14 +10750,14 @@
       </p:sp>
       <p:sp>
         <p:nvSpPr>
-          <p:cNvPr id="10" name="TextBox 9"/>
+          <p:cNvPr id="11" name="TextBox 10"/>
           <p:cNvSpPr txBox="1"/>
           <p:nvPr/>
         </p:nvSpPr>
         <p:spPr>
           <a:xfrm>
-            <a:off x="1874519" y="3447288"/>
-            <a:ext cx="9235440" cy="868680"/>
+            <a:off x="6592824" y="2468879"/>
+            <a:ext cx="2057400" cy="1371600"/>
           </a:xfrm>
           <a:prstGeom prst="rect">
             <a:avLst/>
@@ -9832,55 +10770,55 @@
           </a:bodyPr>
           <a:lstStyle/>
           <a:p>
-            <a:pPr algn="l">
-              <a:spcAft>
-                <a:spcPts val="300"/>
-              </a:spcAft>
-            </a:pPr>
-            <a:r>
-              <a:rPr sz="1600" b="1" i="0">
-                <a:solidFill>
-                  <a:srgbClr val="1B2B3A"/>
-                </a:solidFill>
-                <a:latin typeface="Calibri"/>
-              </a:rPr>
-              <a:t>Moyen terme</a:t>
-            </a:r>
-          </a:p>
-          <a:p>
-            <a:pPr algn="l">
+            <a:pPr algn="ctr">
               <a:spcAft>
                 <a:spcPts val="600"/>
               </a:spcAft>
             </a:pPr>
             <a:r>
-              <a:rPr sz="1300" b="0" i="0">
-                <a:solidFill>
-                  <a:srgbClr val="647485"/>
-                </a:solidFill>
-                <a:latin typeface="Calibri"/>
-              </a:rPr>
-              <a:t>Intégrations (Teams déjà en place, puis outils RH/paie et signature), API ouverte, application mobile.</a:t>
-            </a:r>
-          </a:p>
-        </p:txBody>
-      </p:sp>
-      <p:sp>
-        <p:nvSpPr>
-          <p:cNvPr id="11" name="Oval 10"/>
+              <a:rPr sz="2000" b="1" i="0">
+                <a:solidFill>
+                  <a:srgbClr val="84CC16"/>
+                </a:solidFill>
+                <a:latin typeface="Calibri"/>
+              </a:rPr>
+              <a:t>Paiement</a:t>
+            </a:r>
+          </a:p>
+          <a:p>
+            <a:pPr algn="ctr">
+              <a:spcAft>
+                <a:spcPts val="600"/>
+              </a:spcAft>
+            </a:pPr>
+            <a:r>
+              <a:rPr sz="1200" b="0" i="0">
+                <a:solidFill>
+                  <a:srgbClr val="C7D2DD"/>
+                </a:solidFill>
+                <a:latin typeface="Calibri"/>
+              </a:rPr>
+              <a:t>Souscription Stripe opérationnelle de bout en bout</a:t>
+            </a:r>
+          </a:p>
+        </p:txBody>
+      </p:sp>
+      <p:sp>
+        <p:nvSpPr>
+          <p:cNvPr id="12" name="Rounded Rectangle 11"/>
           <p:cNvSpPr/>
           <p:nvPr/>
         </p:nvSpPr>
         <p:spPr>
           <a:xfrm>
-            <a:off x="868680" y="4663440"/>
-            <a:ext cx="502920" cy="502920"/>
-          </a:xfrm>
-          <a:prstGeom prst="ellipse">
-            <a:avLst/>
-          </a:prstGeom>
-          <a:solidFill>
-            <a:srgbClr val="84CC16"/>
+            <a:off x="9134856" y="2194560"/>
+            <a:ext cx="2514600" cy="1828800"/>
+          </a:xfrm>
+          <a:prstGeom prst="roundRect">
+            <a:avLst/>
+          </a:prstGeom>
+          <a:solidFill>
+            <a:srgbClr val="0F1720"/>
           </a:solidFill>
           <a:ln>
             <a:noFill/>
@@ -9905,65 +10843,6 @@
           <a:bodyPr rtlCol="0" anchor="ctr"/>
           <a:lstStyle/>
           <a:p>
-            <a:pPr algn="ctr">
-              <a:spcAft>
-                <a:spcPts val="600"/>
-              </a:spcAft>
-            </a:pPr>
-            <a:r>
-              <a:rPr sz="1800" b="1" i="0">
-                <a:solidFill>
-                  <a:srgbClr val="1B2B3A"/>
-                </a:solidFill>
-                <a:latin typeface="Calibri"/>
-              </a:rPr>
-              <a:t>3</a:t>
-            </a:r>
-          </a:p>
-        </p:txBody>
-      </p:sp>
-      <p:sp>
-        <p:nvSpPr>
-          <p:cNvPr id="12" name="Rounded Rectangle 11"/>
-          <p:cNvSpPr/>
-          <p:nvPr/>
-        </p:nvSpPr>
-        <p:spPr>
-          <a:xfrm>
-            <a:off x="1600200" y="4572000"/>
-            <a:ext cx="9784080" cy="1051560"/>
-          </a:xfrm>
-          <a:prstGeom prst="roundRect">
-            <a:avLst/>
-          </a:prstGeom>
-          <a:solidFill>
-            <a:srgbClr val="F7F9FB"/>
-          </a:solidFill>
-          <a:ln w="12700">
-            <a:solidFill>
-              <a:srgbClr val="E2E8F0"/>
-            </a:solidFill>
-          </a:ln>
-          <a:effectLst/>
-        </p:spPr>
-        <p:style>
-          <a:lnRef idx="1">
-            <a:schemeClr val="accent1"/>
-          </a:lnRef>
-          <a:fillRef idx="3">
-            <a:schemeClr val="accent1"/>
-          </a:fillRef>
-          <a:effectRef idx="2">
-            <a:schemeClr val="accent1"/>
-          </a:effectRef>
-          <a:fontRef idx="minor">
-            <a:schemeClr val="lt1"/>
-          </a:fontRef>
-        </p:style>
-        <p:txBody>
-          <a:bodyPr rtlCol="0" anchor="ctr"/>
-          <a:lstStyle/>
-          <a:p>
             <a:pPr algn="ctr"/>
           </a:p>
         </p:txBody>
@@ -9976,8 +10855,8 @@
         </p:nvSpPr>
         <p:spPr>
           <a:xfrm>
-            <a:off x="1874519" y="4681727"/>
-            <a:ext cx="9235440" cy="868680"/>
+            <a:off x="9363456" y="2468879"/>
+            <a:ext cx="2057400" cy="1371600"/>
           </a:xfrm>
           <a:prstGeom prst="rect">
             <a:avLst/>
@@ -9990,35 +10869,35 @@
           </a:bodyPr>
           <a:lstStyle/>
           <a:p>
-            <a:pPr algn="l">
-              <a:spcAft>
-                <a:spcPts val="300"/>
-              </a:spcAft>
-            </a:pPr>
-            <a:r>
-              <a:rPr sz="1600" b="1" i="0">
-                <a:solidFill>
-                  <a:srgbClr val="1B2B3A"/>
-                </a:solidFill>
-                <a:latin typeface="Calibri"/>
-              </a:rPr>
-              <a:t>Vision</a:t>
-            </a:r>
-          </a:p>
-          <a:p>
-            <a:pPr algn="l">
+            <a:pPr algn="ctr">
               <a:spcAft>
                 <a:spcPts val="600"/>
               </a:spcAft>
             </a:pPr>
             <a:r>
-              <a:rPr sz="1300" b="0" i="0">
-                <a:solidFill>
-                  <a:srgbClr val="647485"/>
-                </a:solidFill>
-                <a:latin typeface="Calibri"/>
-              </a:rPr>
-              <a:t>Devenir la couche de pilotage standard des ESN : intelligence de staffing et recommandations basées sur les données.</a:t>
+              <a:rPr sz="2000" b="1" i="0">
+                <a:solidFill>
+                  <a:srgbClr val="84CC16"/>
+                </a:solidFill>
+                <a:latin typeface="Calibri"/>
+              </a:rPr>
+              <a:t>Modules</a:t>
+            </a:r>
+          </a:p>
+          <a:p>
+            <a:pPr algn="ctr">
+              <a:spcAft>
+                <a:spcPts val="600"/>
+              </a:spcAft>
+            </a:pPr>
+            <a:r>
+              <a:rPr sz="1200" b="0" i="0">
+                <a:solidFill>
+                  <a:srgbClr val="C7D2DD"/>
+                </a:solidFill>
+                <a:latin typeface="Calibri"/>
+              </a:rPr>
+              <a:t>Recrutement &amp; CRM commercial livrés</a:t>
             </a:r>
           </a:p>
         </p:txBody>
@@ -10031,7 +10910,7 @@
         </p:nvSpPr>
         <p:spPr>
           <a:xfrm>
-            <a:off x="822960" y="6172200"/>
+            <a:off x="822960" y="4663440"/>
             <a:ext cx="10543032" cy="457200"/>
           </a:xfrm>
           <a:prstGeom prst="roundRect">
@@ -10077,7 +10956,7 @@
                 </a:solidFill>
                 <a:latin typeface="Calibri"/>
               </a:rPr>
-              <a:t>À COMPLÉTER — prioriser selon vos retours clients et jalons produit</a:t>
+              <a:t>À COMPLÉTER — chiffrer la traction : nb d'ESN clientes, consultants gérés, MRR, croissance MoM, rétention</a:t>
             </a:r>
           </a:p>
         </p:txBody>
@@ -10090,8 +10969,8 @@
         </p:nvSpPr>
         <p:spPr>
           <a:xfrm>
-            <a:off x="11247120" y="6419088"/>
-            <a:ext cx="822960" cy="365760"/>
+            <a:off x="822960" y="5394960"/>
+            <a:ext cx="10515600" cy="822960"/>
           </a:xfrm>
           <a:prstGeom prst="rect">
             <a:avLst/>
@@ -10104,6 +10983,45 @@
           </a:bodyPr>
           <a:lstStyle/>
           <a:p>
+            <a:pPr algn="l">
+              <a:spcAft>
+                <a:spcPts val="600"/>
+              </a:spcAft>
+            </a:pPr>
+            <a:r>
+              <a:rPr sz="1400" b="0" i="1">
+                <a:solidFill>
+                  <a:srgbClr val="C7D2DD"/>
+                </a:solidFill>
+                <a:latin typeface="Calibri"/>
+              </a:rPr>
+              <a:t>Le produit est complet et vendable dès aujourd'hui : l'enjeu est désormais l'accélération commerciale.</a:t>
+            </a:r>
+          </a:p>
+        </p:txBody>
+      </p:sp>
+      <p:sp>
+        <p:nvSpPr>
+          <p:cNvPr id="16" name="TextBox 15"/>
+          <p:cNvSpPr txBox="1"/>
+          <p:nvPr/>
+        </p:nvSpPr>
+        <p:spPr>
+          <a:xfrm>
+            <a:off x="11247120" y="6419088"/>
+            <a:ext cx="822960" cy="365760"/>
+          </a:xfrm>
+          <a:prstGeom prst="rect">
+            <a:avLst/>
+          </a:prstGeom>
+          <a:noFill/>
+        </p:spPr>
+        <p:txBody>
+          <a:bodyPr wrap="square">
+            <a:spAutoFit/>
+          </a:bodyPr>
+          <a:lstStyle/>
+          <a:p>
             <a:pPr algn="r">
               <a:spcAft>
                 <a:spcPts val="600"/>
@@ -10116,7 +11034,7 @@
                 </a:solidFill>
                 <a:latin typeface="Calibri"/>
               </a:rPr>
-              <a:t>8</a:t>
+              <a:t>7</a:t>
             </a:r>
           </a:p>
         </p:txBody>
@@ -10235,7 +11153,7 @@
                 </a:solidFill>
                 <a:latin typeface="Calibri"/>
               </a:rPr>
-              <a:t>ÉQUIPE</a:t>
+              <a:t>ROADMAP</a:t>
             </a:r>
           </a:p>
         </p:txBody>
@@ -10274,21 +11192,78 @@
                 </a:solidFill>
                 <a:latin typeface="Calibri"/>
               </a:rPr>
-              <a:t>Les personnes derrière Konsilys</a:t>
-            </a:r>
-          </a:p>
-        </p:txBody>
-      </p:sp>
-      <p:sp>
-        <p:nvSpPr>
-          <p:cNvPr id="5" name="Rounded Rectangle 4"/>
+              <a:t>Ce qui vient ensuite</a:t>
+            </a:r>
+          </a:p>
+        </p:txBody>
+      </p:sp>
+      <p:sp>
+        <p:nvSpPr>
+          <p:cNvPr id="5" name="Oval 4"/>
           <p:cNvSpPr/>
           <p:nvPr/>
         </p:nvSpPr>
         <p:spPr>
           <a:xfrm>
-            <a:off x="822960" y="2286000"/>
-            <a:ext cx="3429000" cy="2926080"/>
+            <a:off x="868680" y="2194560"/>
+            <a:ext cx="502920" cy="502920"/>
+          </a:xfrm>
+          <a:prstGeom prst="ellipse">
+            <a:avLst/>
+          </a:prstGeom>
+          <a:solidFill>
+            <a:srgbClr val="84CC16"/>
+          </a:solidFill>
+          <a:ln>
+            <a:noFill/>
+          </a:ln>
+          <a:effectLst/>
+        </p:spPr>
+        <p:style>
+          <a:lnRef idx="1">
+            <a:schemeClr val="accent1"/>
+          </a:lnRef>
+          <a:fillRef idx="3">
+            <a:schemeClr val="accent1"/>
+          </a:fillRef>
+          <a:effectRef idx="2">
+            <a:schemeClr val="accent1"/>
+          </a:effectRef>
+          <a:fontRef idx="minor">
+            <a:schemeClr val="lt1"/>
+          </a:fontRef>
+        </p:style>
+        <p:txBody>
+          <a:bodyPr rtlCol="0" anchor="ctr"/>
+          <a:lstStyle/>
+          <a:p>
+            <a:pPr algn="ctr">
+              <a:spcAft>
+                <a:spcPts val="600"/>
+              </a:spcAft>
+            </a:pPr>
+            <a:r>
+              <a:rPr sz="1800" b="1" i="0">
+                <a:solidFill>
+                  <a:srgbClr val="1B2B3A"/>
+                </a:solidFill>
+                <a:latin typeface="Calibri"/>
+              </a:rPr>
+              <a:t>1</a:t>
+            </a:r>
+          </a:p>
+        </p:txBody>
+      </p:sp>
+      <p:sp>
+        <p:nvSpPr>
+          <p:cNvPr id="6" name="Rounded Rectangle 5"/>
+          <p:cNvSpPr/>
+          <p:nvPr/>
+        </p:nvSpPr>
+        <p:spPr>
+          <a:xfrm>
+            <a:off x="1600200" y="2103120"/>
+            <a:ext cx="9784080" cy="1051560"/>
           </a:xfrm>
           <a:prstGeom prst="roundRect">
             <a:avLst/>
@@ -10327,20 +11302,75 @@
       </p:sp>
       <p:sp>
         <p:nvSpPr>
-          <p:cNvPr id="6" name="Oval 5"/>
+          <p:cNvPr id="7" name="TextBox 6"/>
+          <p:cNvSpPr txBox="1"/>
+          <p:nvPr/>
+        </p:nvSpPr>
+        <p:spPr>
+          <a:xfrm>
+            <a:off x="1874519" y="2212848"/>
+            <a:ext cx="9235440" cy="868680"/>
+          </a:xfrm>
+          <a:prstGeom prst="rect">
+            <a:avLst/>
+          </a:prstGeom>
+          <a:noFill/>
+        </p:spPr>
+        <p:txBody>
+          <a:bodyPr wrap="square">
+            <a:spAutoFit/>
+          </a:bodyPr>
+          <a:lstStyle/>
+          <a:p>
+            <a:pPr algn="l">
+              <a:spcAft>
+                <a:spcPts val="300"/>
+              </a:spcAft>
+            </a:pPr>
+            <a:r>
+              <a:rPr sz="1600" b="1" i="0">
+                <a:solidFill>
+                  <a:srgbClr val="1B2B3A"/>
+                </a:solidFill>
+                <a:latin typeface="Calibri"/>
+              </a:rPr>
+              <a:t>Court terme</a:t>
+            </a:r>
+          </a:p>
+          <a:p>
+            <a:pPr algn="l">
+              <a:spcAft>
+                <a:spcPts val="600"/>
+              </a:spcAft>
+            </a:pPr>
+            <a:r>
+              <a:rPr sz="1300" b="0" i="0">
+                <a:solidFill>
+                  <a:srgbClr val="647485"/>
+                </a:solidFill>
+                <a:latin typeface="Calibri"/>
+              </a:rPr>
+              <a:t>Facturation &amp; exports comptables, notifications avancées, tableau de bord dirigeant enrichi.</a:t>
+            </a:r>
+          </a:p>
+        </p:txBody>
+      </p:sp>
+      <p:sp>
+        <p:nvSpPr>
+          <p:cNvPr id="8" name="Oval 7"/>
           <p:cNvSpPr/>
           <p:nvPr/>
         </p:nvSpPr>
         <p:spPr>
           <a:xfrm>
-            <a:off x="2057400" y="2560320"/>
-            <a:ext cx="960120" cy="960120"/>
+            <a:off x="868680" y="3429000"/>
+            <a:ext cx="502920" cy="502920"/>
           </a:xfrm>
           <a:prstGeom prst="ellipse">
             <a:avLst/>
           </a:prstGeom>
           <a:solidFill>
-            <a:srgbClr val="1B2B3A"/>
+            <a:srgbClr val="84CC16"/>
           </a:solidFill>
           <a:ln>
             <a:noFill/>
@@ -10371,98 +11401,27 @@
               </a:spcAft>
             </a:pPr>
             <a:r>
-              <a:rPr sz="2600" b="1" i="0">
-                <a:solidFill>
-                  <a:srgbClr val="84CC16"/>
-                </a:solidFill>
-                <a:latin typeface="Calibri"/>
-              </a:rPr>
-              <a:t>?</a:t>
-            </a:r>
-          </a:p>
-        </p:txBody>
-      </p:sp>
-      <p:sp>
-        <p:nvSpPr>
-          <p:cNvPr id="7" name="TextBox 6"/>
-          <p:cNvSpPr txBox="1"/>
-          <p:nvPr/>
-        </p:nvSpPr>
-        <p:spPr>
-          <a:xfrm>
-            <a:off x="1097280" y="3749039"/>
-            <a:ext cx="2880360" cy="1371600"/>
-          </a:xfrm>
-          <a:prstGeom prst="rect">
-            <a:avLst/>
-          </a:prstGeom>
-          <a:noFill/>
-        </p:spPr>
-        <p:txBody>
-          <a:bodyPr wrap="square">
-            <a:spAutoFit/>
-          </a:bodyPr>
-          <a:lstStyle/>
-          <a:p>
-            <a:pPr algn="ctr">
-              <a:spcAft>
-                <a:spcPts val="300"/>
-              </a:spcAft>
-            </a:pPr>
-            <a:r>
-              <a:rPr sz="1600" b="1" i="0">
+              <a:rPr sz="1800" b="1" i="0">
                 <a:solidFill>
                   <a:srgbClr val="1B2B3A"/>
                 </a:solidFill>
                 <a:latin typeface="Calibri"/>
               </a:rPr>
-              <a:t>Prénom Nom</a:t>
-            </a:r>
-          </a:p>
-          <a:p>
-            <a:pPr algn="ctr">
-              <a:spcAft>
-                <a:spcPts val="600"/>
-              </a:spcAft>
-            </a:pPr>
-            <a:r>
-              <a:rPr sz="1300" b="0" i="0">
-                <a:solidFill>
-                  <a:srgbClr val="84CC16"/>
-                </a:solidFill>
-                <a:latin typeface="Calibri"/>
-              </a:rPr>
-              <a:t>Rôle</a:t>
-            </a:r>
-          </a:p>
-          <a:p>
-            <a:pPr algn="ctr">
-              <a:spcAft>
-                <a:spcPts val="600"/>
-              </a:spcAft>
-            </a:pPr>
-            <a:r>
-              <a:rPr sz="1150" b="0" i="0">
-                <a:solidFill>
-                  <a:srgbClr val="647485"/>
-                </a:solidFill>
-                <a:latin typeface="Calibri"/>
-              </a:rPr>
-              <a:t>Expérience clé, réalisations</a:t>
-            </a:r>
-          </a:p>
-        </p:txBody>
-      </p:sp>
-      <p:sp>
-        <p:nvSpPr>
-          <p:cNvPr id="8" name="Rounded Rectangle 7"/>
+              <a:t>2</a:t>
+            </a:r>
+          </a:p>
+        </p:txBody>
+      </p:sp>
+      <p:sp>
+        <p:nvSpPr>
+          <p:cNvPr id="9" name="Rounded Rectangle 8"/>
           <p:cNvSpPr/>
           <p:nvPr/>
         </p:nvSpPr>
         <p:spPr>
           <a:xfrm>
-            <a:off x="4526280" y="2286000"/>
-            <a:ext cx="3429000" cy="2926080"/>
+            <a:off x="1600200" y="3337560"/>
+            <a:ext cx="9784080" cy="1051560"/>
           </a:xfrm>
           <a:prstGeom prst="roundRect">
             <a:avLst/>
@@ -10501,20 +11460,75 @@
       </p:sp>
       <p:sp>
         <p:nvSpPr>
-          <p:cNvPr id="9" name="Oval 8"/>
+          <p:cNvPr id="10" name="TextBox 9"/>
+          <p:cNvSpPr txBox="1"/>
+          <p:nvPr/>
+        </p:nvSpPr>
+        <p:spPr>
+          <a:xfrm>
+            <a:off x="1874519" y="3447288"/>
+            <a:ext cx="9235440" cy="868680"/>
+          </a:xfrm>
+          <a:prstGeom prst="rect">
+            <a:avLst/>
+          </a:prstGeom>
+          <a:noFill/>
+        </p:spPr>
+        <p:txBody>
+          <a:bodyPr wrap="square">
+            <a:spAutoFit/>
+          </a:bodyPr>
+          <a:lstStyle/>
+          <a:p>
+            <a:pPr algn="l">
+              <a:spcAft>
+                <a:spcPts val="300"/>
+              </a:spcAft>
+            </a:pPr>
+            <a:r>
+              <a:rPr sz="1600" b="1" i="0">
+                <a:solidFill>
+                  <a:srgbClr val="1B2B3A"/>
+                </a:solidFill>
+                <a:latin typeface="Calibri"/>
+              </a:rPr>
+              <a:t>Moyen terme</a:t>
+            </a:r>
+          </a:p>
+          <a:p>
+            <a:pPr algn="l">
+              <a:spcAft>
+                <a:spcPts val="600"/>
+              </a:spcAft>
+            </a:pPr>
+            <a:r>
+              <a:rPr sz="1300" b="0" i="0">
+                <a:solidFill>
+                  <a:srgbClr val="647485"/>
+                </a:solidFill>
+                <a:latin typeface="Calibri"/>
+              </a:rPr>
+              <a:t>Intégrations (Teams déjà en place, puis outils RH/paie et signature), API ouverte, application mobile.</a:t>
+            </a:r>
+          </a:p>
+        </p:txBody>
+      </p:sp>
+      <p:sp>
+        <p:nvSpPr>
+          <p:cNvPr id="11" name="Oval 10"/>
           <p:cNvSpPr/>
           <p:nvPr/>
         </p:nvSpPr>
         <p:spPr>
           <a:xfrm>
-            <a:off x="5760720" y="2560320"/>
-            <a:ext cx="960120" cy="960120"/>
+            <a:off x="868680" y="4663440"/>
+            <a:ext cx="502920" cy="502920"/>
           </a:xfrm>
           <a:prstGeom prst="ellipse">
             <a:avLst/>
           </a:prstGeom>
           <a:solidFill>
-            <a:srgbClr val="1B2B3A"/>
+            <a:srgbClr val="84CC16"/>
           </a:solidFill>
           <a:ln>
             <a:noFill/>
@@ -10545,98 +11559,27 @@
               </a:spcAft>
             </a:pPr>
             <a:r>
-              <a:rPr sz="2600" b="1" i="0">
-                <a:solidFill>
-                  <a:srgbClr val="84CC16"/>
-                </a:solidFill>
-                <a:latin typeface="Calibri"/>
-              </a:rPr>
-              <a:t>?</a:t>
-            </a:r>
-          </a:p>
-        </p:txBody>
-      </p:sp>
-      <p:sp>
-        <p:nvSpPr>
-          <p:cNvPr id="10" name="TextBox 9"/>
-          <p:cNvSpPr txBox="1"/>
-          <p:nvPr/>
-        </p:nvSpPr>
-        <p:spPr>
-          <a:xfrm>
-            <a:off x="4800600" y="3749039"/>
-            <a:ext cx="2880360" cy="1371600"/>
-          </a:xfrm>
-          <a:prstGeom prst="rect">
-            <a:avLst/>
-          </a:prstGeom>
-          <a:noFill/>
-        </p:spPr>
-        <p:txBody>
-          <a:bodyPr wrap="square">
-            <a:spAutoFit/>
-          </a:bodyPr>
-          <a:lstStyle/>
-          <a:p>
-            <a:pPr algn="ctr">
-              <a:spcAft>
-                <a:spcPts val="300"/>
-              </a:spcAft>
-            </a:pPr>
-            <a:r>
-              <a:rPr sz="1600" b="1" i="0">
+              <a:rPr sz="1800" b="1" i="0">
                 <a:solidFill>
                   <a:srgbClr val="1B2B3A"/>
                 </a:solidFill>
                 <a:latin typeface="Calibri"/>
               </a:rPr>
-              <a:t>Prénom Nom</a:t>
-            </a:r>
-          </a:p>
-          <a:p>
-            <a:pPr algn="ctr">
-              <a:spcAft>
-                <a:spcPts val="600"/>
-              </a:spcAft>
-            </a:pPr>
-            <a:r>
-              <a:rPr sz="1300" b="0" i="0">
-                <a:solidFill>
-                  <a:srgbClr val="84CC16"/>
-                </a:solidFill>
-                <a:latin typeface="Calibri"/>
-              </a:rPr>
-              <a:t>Rôle</a:t>
-            </a:r>
-          </a:p>
-          <a:p>
-            <a:pPr algn="ctr">
-              <a:spcAft>
-                <a:spcPts val="600"/>
-              </a:spcAft>
-            </a:pPr>
-            <a:r>
-              <a:rPr sz="1150" b="0" i="0">
-                <a:solidFill>
-                  <a:srgbClr val="647485"/>
-                </a:solidFill>
-                <a:latin typeface="Calibri"/>
-              </a:rPr>
-              <a:t>Expérience clé, réalisations</a:t>
-            </a:r>
-          </a:p>
-        </p:txBody>
-      </p:sp>
-      <p:sp>
-        <p:nvSpPr>
-          <p:cNvPr id="11" name="Rounded Rectangle 10"/>
+              <a:t>3</a:t>
+            </a:r>
+          </a:p>
+        </p:txBody>
+      </p:sp>
+      <p:sp>
+        <p:nvSpPr>
+          <p:cNvPr id="12" name="Rounded Rectangle 11"/>
           <p:cNvSpPr/>
           <p:nvPr/>
         </p:nvSpPr>
         <p:spPr>
           <a:xfrm>
-            <a:off x="8229600" y="2286000"/>
-            <a:ext cx="3429000" cy="2926080"/>
+            <a:off x="1600200" y="4572000"/>
+            <a:ext cx="9784080" cy="1051560"/>
           </a:xfrm>
           <a:prstGeom prst="roundRect">
             <a:avLst/>
@@ -10675,71 +11618,14 @@
       </p:sp>
       <p:sp>
         <p:nvSpPr>
-          <p:cNvPr id="12" name="Oval 11"/>
-          <p:cNvSpPr/>
-          <p:nvPr/>
-        </p:nvSpPr>
-        <p:spPr>
-          <a:xfrm>
-            <a:off x="9464040" y="2560320"/>
-            <a:ext cx="960120" cy="960120"/>
-          </a:xfrm>
-          <a:prstGeom prst="ellipse">
-            <a:avLst/>
-          </a:prstGeom>
-          <a:solidFill>
-            <a:srgbClr val="1B2B3A"/>
-          </a:solidFill>
-          <a:ln>
-            <a:noFill/>
-          </a:ln>
-          <a:effectLst/>
-        </p:spPr>
-        <p:style>
-          <a:lnRef idx="1">
-            <a:schemeClr val="accent1"/>
-          </a:lnRef>
-          <a:fillRef idx="3">
-            <a:schemeClr val="accent1"/>
-          </a:fillRef>
-          <a:effectRef idx="2">
-            <a:schemeClr val="accent1"/>
-          </a:effectRef>
-          <a:fontRef idx="minor">
-            <a:schemeClr val="lt1"/>
-          </a:fontRef>
-        </p:style>
-        <p:txBody>
-          <a:bodyPr rtlCol="0" anchor="ctr"/>
-          <a:lstStyle/>
-          <a:p>
-            <a:pPr algn="ctr">
-              <a:spcAft>
-                <a:spcPts val="600"/>
-              </a:spcAft>
-            </a:pPr>
-            <a:r>
-              <a:rPr sz="2600" b="1" i="0">
-                <a:solidFill>
-                  <a:srgbClr val="84CC16"/>
-                </a:solidFill>
-                <a:latin typeface="Calibri"/>
-              </a:rPr>
-              <a:t>?</a:t>
-            </a:r>
-          </a:p>
-        </p:txBody>
-      </p:sp>
-      <p:sp>
-        <p:nvSpPr>
           <p:cNvPr id="13" name="TextBox 12"/>
           <p:cNvSpPr txBox="1"/>
           <p:nvPr/>
         </p:nvSpPr>
         <p:spPr>
           <a:xfrm>
-            <a:off x="8503920" y="3749039"/>
-            <a:ext cx="2880360" cy="1371600"/>
+            <a:off x="1874519" y="4681727"/>
+            <a:ext cx="9235440" cy="868680"/>
           </a:xfrm>
           <a:prstGeom prst="rect">
             <a:avLst/>
@@ -10752,7 +11638,7 @@
           </a:bodyPr>
           <a:lstStyle/>
           <a:p>
-            <a:pPr algn="ctr">
+            <a:pPr algn="l">
               <a:spcAft>
                 <a:spcPts val="300"/>
               </a:spcAft>
@@ -10764,11 +11650,11 @@
                 </a:solidFill>
                 <a:latin typeface="Calibri"/>
               </a:rPr>
-              <a:t>Prénom Nom</a:t>
-            </a:r>
-          </a:p>
-          <a:p>
-            <a:pPr algn="ctr">
+              <a:t>Vision</a:t>
+            </a:r>
+          </a:p>
+          <a:p>
+            <a:pPr algn="l">
               <a:spcAft>
                 <a:spcPts val="600"/>
               </a:spcAft>
@@ -10776,27 +11662,11 @@
             <a:r>
               <a:rPr sz="1300" b="0" i="0">
                 <a:solidFill>
-                  <a:srgbClr val="84CC16"/>
-                </a:solidFill>
-                <a:latin typeface="Calibri"/>
-              </a:rPr>
-              <a:t>Rôle</a:t>
-            </a:r>
-          </a:p>
-          <a:p>
-            <a:pPr algn="ctr">
-              <a:spcAft>
-                <a:spcPts val="600"/>
-              </a:spcAft>
-            </a:pPr>
-            <a:r>
-              <a:rPr sz="1150" b="0" i="0">
-                <a:solidFill>
                   <a:srgbClr val="647485"/>
                 </a:solidFill>
                 <a:latin typeface="Calibri"/>
               </a:rPr>
-              <a:t>Expérience clé, réalisations</a:t>
+              <a:t>Devenir la couche de pilotage standard des ESN : intelligence de staffing et recommandations basées sur les données.</a:t>
             </a:r>
           </a:p>
         </p:txBody>
@@ -10809,7 +11679,7 @@
         </p:nvSpPr>
         <p:spPr>
           <a:xfrm>
-            <a:off x="822960" y="5806440"/>
+            <a:off x="822960" y="6172200"/>
             <a:ext cx="10543032" cy="457200"/>
           </a:xfrm>
           <a:prstGeom prst="roundRect">
@@ -10855,7 +11725,7 @@
                 </a:solidFill>
                 <a:latin typeface="Calibri"/>
               </a:rPr>
-              <a:t>À COMPLÉTER — renseigner les fondateurs, rôles et parcours (produit/tech/commerce) et conseillers éventuels</a:t>
+              <a:t>À COMPLÉTER — prioriser selon vos retours clients et jalons produit</a:t>
             </a:r>
           </a:p>
         </p:txBody>
@@ -10894,7 +11764,7 @@
                 </a:solidFill>
                 <a:latin typeface="Calibri"/>
               </a:rPr>
-              <a:t>9</a:t>
+              <a:t>8</a:t>
             </a:r>
           </a:p>
         </p:txBody>

--- a/deliverables/Konsilys_Presentation_Investisseurs.pptx
+++ b/deliverables/Konsilys_Presentation_Investisseurs.pptx
@@ -3102,7 +3102,7 @@
       <p:grpSpPr/>
       <p:pic>
         <p:nvPicPr>
-          <p:cNvPr id="2" name="Picture 1" descr="00.png"/>
+          <p:cNvPr id="2" name="Picture 1" descr="Konsilys_Presentation_Investisseurs_01.png"/>
           <p:cNvPicPr>
             <a:picLocks noChangeAspect="1"/>
           </p:cNvPicPr>
@@ -3144,7 +3144,7 @@
       <p:grpSpPr/>
       <p:pic>
         <p:nvPicPr>
-          <p:cNvPr id="2" name="Picture 1" descr="09.png"/>
+          <p:cNvPr id="2" name="Picture 1" descr="Konsilys_Presentation_Investisseurs_10.png"/>
           <p:cNvPicPr>
             <a:picLocks noChangeAspect="1"/>
           </p:cNvPicPr>
@@ -3186,7 +3186,7 @@
       <p:grpSpPr/>
       <p:pic>
         <p:nvPicPr>
-          <p:cNvPr id="2" name="Picture 1" descr="10.png"/>
+          <p:cNvPr id="2" name="Picture 1" descr="Konsilys_Presentation_Investisseurs_11.png"/>
           <p:cNvPicPr>
             <a:picLocks noChangeAspect="1"/>
           </p:cNvPicPr>
@@ -3228,7 +3228,7 @@
       <p:grpSpPr/>
       <p:pic>
         <p:nvPicPr>
-          <p:cNvPr id="2" name="Picture 1" descr="11.png"/>
+          <p:cNvPr id="2" name="Picture 1" descr="Konsilys_Presentation_Investisseurs_12.png"/>
           <p:cNvPicPr>
             <a:picLocks noChangeAspect="1"/>
           </p:cNvPicPr>
@@ -3270,7 +3270,7 @@
       <p:grpSpPr/>
       <p:pic>
         <p:nvPicPr>
-          <p:cNvPr id="2" name="Picture 1" descr="12.png"/>
+          <p:cNvPr id="2" name="Picture 1" descr="Konsilys_Presentation_Investisseurs_13.png"/>
           <p:cNvPicPr>
             <a:picLocks noChangeAspect="1"/>
           </p:cNvPicPr>
@@ -3312,7 +3312,7 @@
       <p:grpSpPr/>
       <p:pic>
         <p:nvPicPr>
-          <p:cNvPr id="2" name="Picture 1" descr="01.png"/>
+          <p:cNvPr id="2" name="Picture 1" descr="Konsilys_Presentation_Investisseurs_02.png"/>
           <p:cNvPicPr>
             <a:picLocks noChangeAspect="1"/>
           </p:cNvPicPr>
@@ -3354,7 +3354,7 @@
       <p:grpSpPr/>
       <p:pic>
         <p:nvPicPr>
-          <p:cNvPr id="2" name="Picture 1" descr="02.png"/>
+          <p:cNvPr id="2" name="Picture 1" descr="Konsilys_Presentation_Investisseurs_03.png"/>
           <p:cNvPicPr>
             <a:picLocks noChangeAspect="1"/>
           </p:cNvPicPr>
@@ -3396,7 +3396,7 @@
       <p:grpSpPr/>
       <p:pic>
         <p:nvPicPr>
-          <p:cNvPr id="2" name="Picture 1" descr="03.png"/>
+          <p:cNvPr id="2" name="Picture 1" descr="Konsilys_Presentation_Investisseurs_04.png"/>
           <p:cNvPicPr>
             <a:picLocks noChangeAspect="1"/>
           </p:cNvPicPr>
@@ -3438,7 +3438,7 @@
       <p:grpSpPr/>
       <p:pic>
         <p:nvPicPr>
-          <p:cNvPr id="2" name="Picture 1" descr="04.png"/>
+          <p:cNvPr id="2" name="Picture 1" descr="Konsilys_Presentation_Investisseurs_05.png"/>
           <p:cNvPicPr>
             <a:picLocks noChangeAspect="1"/>
           </p:cNvPicPr>
@@ -3480,7 +3480,7 @@
       <p:grpSpPr/>
       <p:pic>
         <p:nvPicPr>
-          <p:cNvPr id="2" name="Picture 1" descr="05.png"/>
+          <p:cNvPr id="2" name="Picture 1" descr="Konsilys_Presentation_Investisseurs_06.png"/>
           <p:cNvPicPr>
             <a:picLocks noChangeAspect="1"/>
           </p:cNvPicPr>
@@ -3522,7 +3522,7 @@
       <p:grpSpPr/>
       <p:pic>
         <p:nvPicPr>
-          <p:cNvPr id="2" name="Picture 1" descr="06.png"/>
+          <p:cNvPr id="2" name="Picture 1" descr="Konsilys_Presentation_Investisseurs_07.png"/>
           <p:cNvPicPr>
             <a:picLocks noChangeAspect="1"/>
           </p:cNvPicPr>
@@ -3564,7 +3564,7 @@
       <p:grpSpPr/>
       <p:pic>
         <p:nvPicPr>
-          <p:cNvPr id="2" name="Picture 1" descr="07.png"/>
+          <p:cNvPr id="2" name="Picture 1" descr="Konsilys_Presentation_Investisseurs_08.png"/>
           <p:cNvPicPr>
             <a:picLocks noChangeAspect="1"/>
           </p:cNvPicPr>
@@ -3606,7 +3606,7 @@
       <p:grpSpPr/>
       <p:pic>
         <p:nvPicPr>
-          <p:cNvPr id="2" name="Picture 1" descr="08.png"/>
+          <p:cNvPr id="2" name="Picture 1" descr="Konsilys_Presentation_Investisseurs_09.png"/>
           <p:cNvPicPr>
             <a:picLocks noChangeAspect="1"/>
           </p:cNvPicPr>
